--- a/docs/distributed/demo-overview.pptx
+++ b/docs/distributed/demo-overview.pptx
@@ -13668,7 +13668,7 @@
                 <a:ea typeface="Malgun Gothic" pitchFamily="34" charset="-122"/>
                 <a:cs typeface="Malgun Gothic" pitchFamily="34" charset="-120"/>
               </a:rPr>
-              <a:t>원래 Alpamayo open-loop 테스트 → 업스트림 Carlamayo(한 호스트) → 이번 데모(두 호스트)</a:t>
+              <a:t>공식 Alpamayo open-loop 테스트 → 업스트림 Carlamayo(한 호스트) → 이번 데모(두 호스트)</a:t>
             </a:r>
             <a:endParaRPr lang="en-US" sz="1400" dirty="0"/>
           </a:p>
@@ -13866,7 +13866,7 @@
                           <a:ea typeface="Malgun Gothic" pitchFamily="34" charset="-122"/>
                           <a:cs typeface="Malgun Gothic" pitchFamily="34" charset="-120"/>
                         </a:rPr>
-                        <a:t>원래 Alpamayo open-loop 테스트</a:t>
+                        <a:t>공식 Alpamayo open-loop 테스트 (NVIDIA 노트북)</a:t>
                       </a:r>
                       <a:endParaRPr lang="en-US" sz="1200" dirty="0">
                         <a:latin typeface="Malgun Gothic" charset="0"/>
@@ -14140,7 +14140,7 @@
                           <a:ea typeface="Malgun Gothic" pitchFamily="34" charset="-122"/>
                           <a:cs typeface="Malgun Gothic" pitchFamily="34" charset="-120"/>
                         </a:rPr>
-                        <a:t>녹화 클립 재생(공식 노트북, carla_data)</a:t>
+                        <a:t>PhysicalAI-AV 실차 데이터셋 클립 1개 (HF 스트리밍) 재생</a:t>
                       </a:r>
                       <a:endParaRPr lang="en-US" sz="1200" dirty="0">
                         <a:latin typeface="Malgun Gothic" charset="0"/>
@@ -14414,7 +14414,7 @@
                           <a:ea typeface="Malgun Gothic" pitchFamily="34" charset="-122"/>
                           <a:cs typeface="Malgun Gothic" pitchFamily="34" charset="-120"/>
                         </a:rPr>
-                        <a:t>없음. 예측을 그림·지표로 확인</a:t>
+                        <a:t>없음. 예측 궤적을 그림·지표로만 확인</a:t>
                       </a:r>
                       <a:endParaRPr lang="en-US" sz="1200" dirty="0">
                         <a:latin typeface="Malgun Gothic" charset="0"/>
@@ -14688,7 +14688,7 @@
                           <a:ea typeface="Malgun Gothic" pitchFamily="34" charset="-122"/>
                           <a:cs typeface="Malgun Gothic" pitchFamily="34" charset="-120"/>
                         </a:rPr>
-                        <a:t>GPU 1대에 모델</a:t>
+                        <a:t>GPU 1대에서 노트북 실행 (bf16 약 24 GB)</a:t>
                       </a:r>
                       <a:endParaRPr lang="en-US" sz="1200" dirty="0">
                         <a:latin typeface="Malgun Gothic" charset="0"/>
@@ -16058,7 +16058,7 @@
                           <a:ea typeface="Malgun Gothic" pitchFamily="34" charset="-122"/>
                           <a:cs typeface="Malgun Gothic" pitchFamily="34" charset="-120"/>
                         </a:rPr>
-                        <a:t>ADE/FDE, 영상 오버레이</a:t>
+                        <a:t>예측 vs 실제 궤적 minADE, CoC 문장, 궤적 그림</a:t>
                       </a:r>
                       <a:endParaRPr lang="en-US" sz="1200" dirty="0">
                         <a:latin typeface="Malgun Gothic" charset="0"/>

--- a/docs/distributed/demo-overview.pptx
+++ b/docs/distributed/demo-overview.pptx
@@ -15492,7 +15492,7 @@
                 <a:ea typeface="Malgun Gothic" pitchFamily="34" charset="-122"/>
                 <a:cs typeface="Malgun Gothic" pitchFamily="34" charset="-120"/>
               </a:rPr>
-              <a:t>배포 다이어그램과 closed-loop 한 사이클</a:t>
+              <a:t>배포 전/후 비교: 같은 컴포넌트, 모델 위치만 다르다</a:t>
             </a:r>
             <a:endParaRPr lang="en-US" sz="2800" dirty="0"/>
           </a:p>
@@ -15531,7 +15531,7 @@
                 <a:ea typeface="Malgun Gothic" pitchFamily="34" charset="-122"/>
                 <a:cs typeface="Malgun Gothic" pitchFamily="34" charset="-120"/>
               </a:rPr>
-              <a:t>①~④가 약 1초마다 반복된다. 응답(③)은 요청(②)과 같은 gRPC 연결로 돌아오고, 그 사이 시뮬레이터는 10 Hz로 계속 진행</a:t>
+              <a:t>두 그림은 같은 컴포넌트 집합. 달라진 것은 어댑터 상자, 모델 상자의 위치, GPU가 두 호스트로 나뉜 것뿐 (①~④ = closed-loop 한 사이클)</a:t>
             </a:r>
             <a:endParaRPr lang="en-US" sz="1400" dirty="0"/>
           </a:p>
@@ -15615,9 +15615,48 @@
           </a:p>
         </p:txBody>
       </p:sp>
+      <p:sp>
+        <p:nvSpPr>
+          <p:cNvPr id="6" name="Text 4"/>
+          <p:cNvSpPr txBox="1"/>
+          <p:nvPr/>
+        </p:nvSpPr>
+        <p:spPr>
+          <a:xfrm>
+            <a:off x="548640" y="1371600"/>
+            <a:ext cx="11094415" cy="256032"/>
+          </a:xfrm>
+          <a:prstGeom prst="rect">
+            <a:avLst/>
+          </a:prstGeom>
+          <a:noFill/>
+          <a:ln/>
+        </p:spPr>
+        <p:txBody>
+          <a:bodyPr wrap="square" lIns="0" tIns="0" rIns="0" bIns="0" rtlCol="0" anchor="t"/>
+          <a:lstStyle/>
+          <a:p>
+            <a:pPr indent="0" marL="0">
+              <a:buNone/>
+            </a:pPr>
+            <a:r>
+              <a:rPr lang="en-US" sz="1050" b="1" dirty="0">
+                <a:solidFill>
+                  <a:srgbClr val="1B2A41"/>
+                </a:solidFill>
+                <a:latin typeface="Malgun Gothic" pitchFamily="34" charset="0"/>
+                <a:ea typeface="Malgun Gothic" pitchFamily="34" charset="-122"/>
+                <a:cs typeface="Malgun Gothic" pitchFamily="34" charset="-120"/>
+              </a:rPr>
+              <a:t>분리 전 (업스트림 Carlamayo, 단일 호스트): 모델이 클라이언트 프로세스 안에 있고 CARLA와 GPU를 나눠 쓴다</a:t>
+            </a:r>
+            <a:endParaRPr lang="en-US" sz="1050" dirty="0"/>
+          </a:p>
+        </p:txBody>
+      </p:sp>
       <p:pic>
         <p:nvPicPr>
-          <p:cNvPr id="6" name="Image 0" descr="split-deployment.png">    </p:cNvPr>
+          <p:cNvPr id="7" name="Image 0" descr="current-deployment.png">    </p:cNvPr>
           <p:cNvPicPr>
             <a:picLocks noChangeAspect="1"/>
           </p:cNvPicPr>
@@ -15631,8 +15670,8 @@
         </p:blipFill>
         <p:spPr>
           <a:xfrm>
-            <a:off x="548640" y="1371600"/>
-            <a:ext cx="11094415" cy="1952843"/>
+            <a:off x="1112368" y="1645920"/>
+            <a:ext cx="9966960" cy="2453601"/>
           </a:xfrm>
           <a:prstGeom prst="rect">
             <a:avLst/>
@@ -15641,144 +15680,14 @@
       </p:pic>
       <p:sp>
         <p:nvSpPr>
-          <p:cNvPr id="7" name="Shape 4"/>
-          <p:cNvSpPr/>
-          <p:nvPr/>
-        </p:nvSpPr>
-        <p:spPr>
-          <a:xfrm>
-            <a:off x="548640" y="3644483"/>
-            <a:ext cx="2602154" cy="1188720"/>
-          </a:xfrm>
-          <a:prstGeom prst="roundRect">
-            <a:avLst>
-              <a:gd name="adj" fmla="val 6154"/>
-            </a:avLst>
-          </a:prstGeom>
-          <a:solidFill>
-            <a:srgbClr val="F3F5F8"/>
-          </a:solidFill>
-          <a:ln w="9525">
-            <a:solidFill>
-              <a:srgbClr val="2A6FDB"/>
-            </a:solidFill>
-            <a:prstDash val="solid"/>
-          </a:ln>
-        </p:spPr>
-      </p:sp>
-      <p:sp>
-        <p:nvSpPr>
-          <p:cNvPr id="8" name="Shape 5"/>
-          <p:cNvSpPr/>
-          <p:nvPr/>
-        </p:nvSpPr>
-        <p:spPr>
-          <a:xfrm>
-            <a:off x="658368" y="3754211"/>
-            <a:ext cx="310896" cy="310896"/>
-          </a:xfrm>
-          <a:prstGeom prst="ellipse">
-            <a:avLst/>
-          </a:prstGeom>
-          <a:solidFill>
-            <a:srgbClr val="2A6FDB"/>
-          </a:solidFill>
-          <a:ln w="12700">
-            <a:solidFill>
-              <a:srgbClr val="2A6FDB"/>
-            </a:solidFill>
-            <a:prstDash val="solid"/>
-          </a:ln>
-        </p:spPr>
-      </p:sp>
-      <p:sp>
-        <p:nvSpPr>
-          <p:cNvPr id="9" name="Text 6"/>
+          <p:cNvPr id="8" name="Text 5"/>
           <p:cNvSpPr txBox="1"/>
           <p:nvPr/>
         </p:nvSpPr>
         <p:spPr>
           <a:xfrm>
-            <a:off x="658368" y="3754211"/>
-            <a:ext cx="310896" cy="310896"/>
-          </a:xfrm>
-          <a:prstGeom prst="rect">
-            <a:avLst/>
-          </a:prstGeom>
-          <a:noFill/>
-          <a:ln/>
-        </p:spPr>
-        <p:txBody>
-          <a:bodyPr wrap="square" lIns="0" tIns="0" rIns="0" bIns="0" rtlCol="0" anchor="ctr"/>
-          <a:lstStyle/>
-          <a:p>
-            <a:pPr algn="ctr" indent="0" marL="0">
-              <a:buNone/>
-            </a:pPr>
-            <a:r>
-              <a:rPr lang="en-US" sz="1100" b="1" dirty="0">
-                <a:solidFill>
-                  <a:srgbClr val="FFFFFF"/>
-                </a:solidFill>
-                <a:latin typeface="Malgun Gothic" pitchFamily="34" charset="0"/>
-                <a:ea typeface="Malgun Gothic" pitchFamily="34" charset="-122"/>
-                <a:cs typeface="Malgun Gothic" pitchFamily="34" charset="-120"/>
-              </a:rPr>
-              <a:t>1</a:t>
-            </a:r>
-            <a:endParaRPr lang="en-US" sz="1100" dirty="0"/>
-          </a:p>
-        </p:txBody>
-      </p:sp>
-      <p:sp>
-        <p:nvSpPr>
-          <p:cNvPr id="10" name="Text 7"/>
-          <p:cNvSpPr txBox="1"/>
-          <p:nvPr/>
-        </p:nvSpPr>
-        <p:spPr>
-          <a:xfrm>
-            <a:off x="1024128" y="3735923"/>
-            <a:ext cx="2035226" cy="347472"/>
-          </a:xfrm>
-          <a:prstGeom prst="rect">
-            <a:avLst/>
-          </a:prstGeom>
-          <a:noFill/>
-          <a:ln/>
-        </p:spPr>
-        <p:txBody>
-          <a:bodyPr wrap="square" lIns="0" tIns="0" rIns="0" bIns="0" rtlCol="0" anchor="ctr"/>
-          <a:lstStyle/>
-          <a:p>
-            <a:pPr indent="0" marL="0">
-              <a:buNone/>
-            </a:pPr>
-            <a:r>
-              <a:rPr lang="en-US" sz="1150" b="1" dirty="0">
-                <a:solidFill>
-                  <a:srgbClr val="2A6FDB"/>
-                </a:solidFill>
-                <a:latin typeface="Malgun Gothic" pitchFamily="34" charset="0"/>
-                <a:ea typeface="Malgun Gothic" pitchFamily="34" charset="-122"/>
-                <a:cs typeface="Malgun Gothic" pitchFamily="34" charset="-120"/>
-              </a:rPr>
-              <a:t>카메라 캡처</a:t>
-            </a:r>
-            <a:endParaRPr lang="en-US" sz="1150" dirty="0"/>
-          </a:p>
-        </p:txBody>
-      </p:sp>
-      <p:sp>
-        <p:nvSpPr>
-          <p:cNvPr id="11" name="Text 8"/>
-          <p:cNvSpPr txBox="1"/>
-          <p:nvPr/>
-        </p:nvSpPr>
-        <p:spPr>
-          <a:xfrm>
-            <a:off x="658368" y="4101683"/>
-            <a:ext cx="2382698" cy="658368"/>
+            <a:off x="548640" y="4264113"/>
+            <a:ext cx="11094415" cy="256032"/>
           </a:xfrm>
           <a:prstGeom prst="rect">
             <a:avLst/>
@@ -15794,638 +15703,44 @@
               <a:buNone/>
             </a:pPr>
             <a:r>
-              <a:rPr lang="en-US" sz="950" dirty="0">
-                <a:solidFill>
-                  <a:srgbClr val="24313F"/>
-                </a:solidFill>
-                <a:latin typeface="Malgun Gothic" pitchFamily="34" charset="0"/>
-                <a:ea typeface="Malgun Gothic" pitchFamily="34" charset="-122"/>
-                <a:cs typeface="Malgun Gothic" pitchFamily="34" charset="-120"/>
-              </a:rPr>
-              <a:t>A: CARLA가 4대 카메라 최근 4프레임을 클라이언트에 전달 (loopback 300~600 MB/s)</a:t>
-            </a:r>
-            <a:endParaRPr lang="en-US" sz="950" dirty="0"/>
+              <a:rPr lang="en-US" sz="1050" b="1" dirty="0">
+                <a:solidFill>
+                  <a:srgbClr val="E0762B"/>
+                </a:solidFill>
+                <a:latin typeface="Malgun Gothic" pitchFamily="34" charset="0"/>
+                <a:ea typeface="Malgun Gothic" pitchFamily="34" charset="-122"/>
+                <a:cs typeface="Malgun Gothic" pitchFamily="34" charset="-120"/>
+              </a:rPr>
+              <a:t>분리 후 (이번 데모): 어댑터가 gRPC 클라이언트로 바뀌고, 모델은 B의 alpamayo_server.py 프로세스에 상주. ② 요청 / ③ 응답이 VPC 안 TCP를 건넌다</a:t>
+            </a:r>
+            <a:endParaRPr lang="en-US" sz="1050" dirty="0"/>
           </a:p>
         </p:txBody>
       </p:sp>
-      <p:sp>
-        <p:nvSpPr>
-          <p:cNvPr id="12" name="Shape 9"/>
-          <p:cNvSpPr/>
-          <p:nvPr/>
-        </p:nvSpPr>
-        <p:spPr>
-          <a:xfrm>
-            <a:off x="3178226" y="4238843"/>
-            <a:ext cx="173736" cy="0"/>
-          </a:xfrm>
-          <a:prstGeom prst="line">
-            <a:avLst/>
-          </a:prstGeom>
-          <a:noFill/>
-          <a:ln w="15875">
-            <a:solidFill>
-              <a:srgbClr val="6B7A8C"/>
-            </a:solidFill>
-            <a:prstDash val="solid"/>
-            <a:tailEnd type="triangle"/>
-          </a:ln>
-        </p:spPr>
-      </p:sp>
-      <p:sp>
-        <p:nvSpPr>
-          <p:cNvPr id="13" name="Shape 10"/>
-          <p:cNvSpPr/>
-          <p:nvPr/>
-        </p:nvSpPr>
-        <p:spPr>
-          <a:xfrm>
-            <a:off x="3379394" y="3644483"/>
-            <a:ext cx="2602154" cy="1188720"/>
-          </a:xfrm>
-          <a:prstGeom prst="roundRect">
-            <a:avLst>
-              <a:gd name="adj" fmla="val 6154"/>
-            </a:avLst>
-          </a:prstGeom>
-          <a:solidFill>
-            <a:srgbClr val="F3F5F8"/>
-          </a:solidFill>
-          <a:ln w="9525">
-            <a:solidFill>
-              <a:srgbClr val="2A6FDB"/>
-            </a:solidFill>
-            <a:prstDash val="solid"/>
-          </a:ln>
-        </p:spPr>
-      </p:sp>
-      <p:sp>
-        <p:nvSpPr>
-          <p:cNvPr id="14" name="Shape 11"/>
-          <p:cNvSpPr/>
-          <p:nvPr/>
-        </p:nvSpPr>
-        <p:spPr>
-          <a:xfrm>
-            <a:off x="3489122" y="3754211"/>
-            <a:ext cx="310896" cy="310896"/>
-          </a:xfrm>
-          <a:prstGeom prst="ellipse">
-            <a:avLst/>
-          </a:prstGeom>
-          <a:solidFill>
-            <a:srgbClr val="2A6FDB"/>
-          </a:solidFill>
-          <a:ln w="12700">
-            <a:solidFill>
-              <a:srgbClr val="2A6FDB"/>
-            </a:solidFill>
-            <a:prstDash val="solid"/>
-          </a:ln>
-        </p:spPr>
-      </p:sp>
-      <p:sp>
-        <p:nvSpPr>
-          <p:cNvPr id="15" name="Text 12"/>
-          <p:cNvSpPr txBox="1"/>
-          <p:nvPr/>
-        </p:nvSpPr>
-        <p:spPr>
-          <a:xfrm>
-            <a:off x="3489122" y="3754211"/>
-            <a:ext cx="310896" cy="310896"/>
+      <p:pic>
+        <p:nvPicPr>
+          <p:cNvPr id="9" name="Image 1" descr="split-deployment.png">    </p:cNvPr>
+          <p:cNvPicPr>
+            <a:picLocks noChangeAspect="1"/>
+          </p:cNvPicPr>
+          <p:nvPr/>
+        </p:nvPicPr>
+        <p:blipFill>
+          <a:blip r:embed="rId2"/>
+          <a:stretch>
+            <a:fillRect/>
+          </a:stretch>
+        </p:blipFill>
+        <p:spPr>
+          <a:xfrm>
+            <a:off x="1112368" y="4538433"/>
+            <a:ext cx="9966960" cy="1919657"/>
           </a:xfrm>
           <a:prstGeom prst="rect">
             <a:avLst/>
           </a:prstGeom>
-          <a:noFill/>
-          <a:ln/>
-        </p:spPr>
-        <p:txBody>
-          <a:bodyPr wrap="square" lIns="0" tIns="0" rIns="0" bIns="0" rtlCol="0" anchor="ctr"/>
-          <a:lstStyle/>
-          <a:p>
-            <a:pPr algn="ctr" indent="0" marL="0">
-              <a:buNone/>
-            </a:pPr>
-            <a:r>
-              <a:rPr lang="en-US" sz="1100" b="1" dirty="0">
-                <a:solidFill>
-                  <a:srgbClr val="FFFFFF"/>
-                </a:solidFill>
-                <a:latin typeface="Malgun Gothic" pitchFamily="34" charset="0"/>
-                <a:ea typeface="Malgun Gothic" pitchFamily="34" charset="-122"/>
-                <a:cs typeface="Malgun Gothic" pitchFamily="34" charset="-120"/>
-              </a:rPr>
-              <a:t>2</a:t>
-            </a:r>
-            <a:endParaRPr lang="en-US" sz="1100" dirty="0"/>
-          </a:p>
-        </p:txBody>
-      </p:sp>
-      <p:sp>
-        <p:nvSpPr>
-          <p:cNvPr id="16" name="Text 13"/>
-          <p:cNvSpPr txBox="1"/>
-          <p:nvPr/>
-        </p:nvSpPr>
-        <p:spPr>
-          <a:xfrm>
-            <a:off x="3854882" y="3735923"/>
-            <a:ext cx="2035226" cy="347472"/>
-          </a:xfrm>
-          <a:prstGeom prst="rect">
-            <a:avLst/>
-          </a:prstGeom>
-          <a:noFill/>
-          <a:ln/>
-        </p:spPr>
-        <p:txBody>
-          <a:bodyPr wrap="square" lIns="0" tIns="0" rIns="0" bIns="0" rtlCol="0" anchor="ctr"/>
-          <a:lstStyle/>
-          <a:p>
-            <a:pPr indent="0" marL="0">
-              <a:buNone/>
-            </a:pPr>
-            <a:r>
-              <a:rPr lang="en-US" sz="1150" b="1" dirty="0">
-                <a:solidFill>
-                  <a:srgbClr val="2A6FDB"/>
-                </a:solidFill>
-                <a:latin typeface="Malgun Gothic" pitchFamily="34" charset="0"/>
-                <a:ea typeface="Malgun Gothic" pitchFamily="34" charset="-122"/>
-                <a:cs typeface="Malgun Gothic" pitchFamily="34" charset="-120"/>
-              </a:rPr>
-              <a:t>인코딩·전송</a:t>
-            </a:r>
-            <a:endParaRPr lang="en-US" sz="1150" dirty="0"/>
-          </a:p>
-        </p:txBody>
-      </p:sp>
-      <p:sp>
-        <p:nvSpPr>
-          <p:cNvPr id="17" name="Text 14"/>
-          <p:cNvSpPr txBox="1"/>
-          <p:nvPr/>
-        </p:nvSpPr>
-        <p:spPr>
-          <a:xfrm>
-            <a:off x="3489122" y="4101683"/>
-            <a:ext cx="2382698" cy="658368"/>
-          </a:xfrm>
-          <a:prstGeom prst="rect">
-            <a:avLst/>
-          </a:prstGeom>
-          <a:noFill/>
-          <a:ln/>
-        </p:spPr>
-        <p:txBody>
-          <a:bodyPr wrap="square" lIns="0" tIns="0" rIns="0" bIns="0" rtlCol="0" anchor="t"/>
-          <a:lstStyle/>
-          <a:p>
-            <a:pPr indent="0" marL="0">
-              <a:buNone/>
-            </a:pPr>
-            <a:r>
-              <a:rPr lang="en-US" sz="950" dirty="0">
-                <a:solidFill>
-                  <a:srgbClr val="24313F"/>
-                </a:solidFill>
-                <a:latin typeface="Malgun Gothic" pitchFamily="34" charset="0"/>
-                <a:ea typeface="Malgun Gothic" pitchFamily="34" charset="-122"/>
-                <a:cs typeface="Malgun Gothic" pitchFamily="34" charset="-120"/>
-              </a:rPr>
-              <a:t>A: 워커 스레드가 JPEG로 압축해 자차 이력·프롬프트·run_id와 함께 Predict 요청 (5~8 MB)</a:t>
-            </a:r>
-            <a:endParaRPr lang="en-US" sz="950" dirty="0"/>
-          </a:p>
-        </p:txBody>
-      </p:sp>
-      <p:sp>
-        <p:nvSpPr>
-          <p:cNvPr id="18" name="Shape 15"/>
-          <p:cNvSpPr/>
-          <p:nvPr/>
-        </p:nvSpPr>
-        <p:spPr>
-          <a:xfrm>
-            <a:off x="6008980" y="4238843"/>
-            <a:ext cx="173736" cy="0"/>
-          </a:xfrm>
-          <a:prstGeom prst="line">
-            <a:avLst/>
-          </a:prstGeom>
-          <a:noFill/>
-          <a:ln w="15875">
-            <a:solidFill>
-              <a:srgbClr val="6B7A8C"/>
-            </a:solidFill>
-            <a:prstDash val="solid"/>
-            <a:tailEnd type="triangle"/>
-          </a:ln>
-        </p:spPr>
-      </p:sp>
-      <p:sp>
-        <p:nvSpPr>
-          <p:cNvPr id="19" name="Shape 16"/>
-          <p:cNvSpPr/>
-          <p:nvPr/>
-        </p:nvSpPr>
-        <p:spPr>
-          <a:xfrm>
-            <a:off x="6210148" y="3644483"/>
-            <a:ext cx="2602154" cy="1188720"/>
-          </a:xfrm>
-          <a:prstGeom prst="roundRect">
-            <a:avLst>
-              <a:gd name="adj" fmla="val 6154"/>
-            </a:avLst>
-          </a:prstGeom>
-          <a:solidFill>
-            <a:srgbClr val="F3F5F8"/>
-          </a:solidFill>
-          <a:ln w="9525">
-            <a:solidFill>
-              <a:srgbClr val="E0762B"/>
-            </a:solidFill>
-            <a:prstDash val="solid"/>
-          </a:ln>
-        </p:spPr>
-      </p:sp>
-      <p:sp>
-        <p:nvSpPr>
-          <p:cNvPr id="20" name="Shape 17"/>
-          <p:cNvSpPr/>
-          <p:nvPr/>
-        </p:nvSpPr>
-        <p:spPr>
-          <a:xfrm>
-            <a:off x="6319876" y="3754211"/>
-            <a:ext cx="310896" cy="310896"/>
-          </a:xfrm>
-          <a:prstGeom prst="ellipse">
-            <a:avLst/>
-          </a:prstGeom>
-          <a:solidFill>
-            <a:srgbClr val="E0762B"/>
-          </a:solidFill>
-          <a:ln w="12700">
-            <a:solidFill>
-              <a:srgbClr val="E0762B"/>
-            </a:solidFill>
-            <a:prstDash val="solid"/>
-          </a:ln>
-        </p:spPr>
-      </p:sp>
-      <p:sp>
-        <p:nvSpPr>
-          <p:cNvPr id="21" name="Text 18"/>
-          <p:cNvSpPr txBox="1"/>
-          <p:nvPr/>
-        </p:nvSpPr>
-        <p:spPr>
-          <a:xfrm>
-            <a:off x="6319876" y="3754211"/>
-            <a:ext cx="310896" cy="310896"/>
-          </a:xfrm>
-          <a:prstGeom prst="rect">
-            <a:avLst/>
-          </a:prstGeom>
-          <a:noFill/>
-          <a:ln/>
-        </p:spPr>
-        <p:txBody>
-          <a:bodyPr wrap="square" lIns="0" tIns="0" rIns="0" bIns="0" rtlCol="0" anchor="ctr"/>
-          <a:lstStyle/>
-          <a:p>
-            <a:pPr algn="ctr" indent="0" marL="0">
-              <a:buNone/>
-            </a:pPr>
-            <a:r>
-              <a:rPr lang="en-US" sz="1100" b="1" dirty="0">
-                <a:solidFill>
-                  <a:srgbClr val="FFFFFF"/>
-                </a:solidFill>
-                <a:latin typeface="Malgun Gothic" pitchFamily="34" charset="0"/>
-                <a:ea typeface="Malgun Gothic" pitchFamily="34" charset="-122"/>
-                <a:cs typeface="Malgun Gothic" pitchFamily="34" charset="-120"/>
-              </a:rPr>
-              <a:t>3</a:t>
-            </a:r>
-            <a:endParaRPr lang="en-US" sz="1100" dirty="0"/>
-          </a:p>
-        </p:txBody>
-      </p:sp>
-      <p:sp>
-        <p:nvSpPr>
-          <p:cNvPr id="22" name="Text 19"/>
-          <p:cNvSpPr txBox="1"/>
-          <p:nvPr/>
-        </p:nvSpPr>
-        <p:spPr>
-          <a:xfrm>
-            <a:off x="6685636" y="3735923"/>
-            <a:ext cx="2035226" cy="347472"/>
-          </a:xfrm>
-          <a:prstGeom prst="rect">
-            <a:avLst/>
-          </a:prstGeom>
-          <a:noFill/>
-          <a:ln/>
-        </p:spPr>
-        <p:txBody>
-          <a:bodyPr wrap="square" lIns="0" tIns="0" rIns="0" bIns="0" rtlCol="0" anchor="ctr"/>
-          <a:lstStyle/>
-          <a:p>
-            <a:pPr indent="0" marL="0">
-              <a:buNone/>
-            </a:pPr>
-            <a:r>
-              <a:rPr lang="en-US" sz="1150" b="1" dirty="0">
-                <a:solidFill>
-                  <a:srgbClr val="E0762B"/>
-                </a:solidFill>
-                <a:latin typeface="Malgun Gothic" pitchFamily="34" charset="0"/>
-                <a:ea typeface="Malgun Gothic" pitchFamily="34" charset="-122"/>
-                <a:cs typeface="Malgun Gothic" pitchFamily="34" charset="-120"/>
-              </a:rPr>
-              <a:t>추론·응답</a:t>
-            </a:r>
-            <a:endParaRPr lang="en-US" sz="1150" dirty="0"/>
-          </a:p>
-        </p:txBody>
-      </p:sp>
-      <p:sp>
-        <p:nvSpPr>
-          <p:cNvPr id="23" name="Text 20"/>
-          <p:cNvSpPr txBox="1"/>
-          <p:nvPr/>
-        </p:nvSpPr>
-        <p:spPr>
-          <a:xfrm>
-            <a:off x="6319876" y="4101683"/>
-            <a:ext cx="2382698" cy="658368"/>
-          </a:xfrm>
-          <a:prstGeom prst="rect">
-            <a:avLst/>
-          </a:prstGeom>
-          <a:noFill/>
-          <a:ln/>
-        </p:spPr>
-        <p:txBody>
-          <a:bodyPr wrap="square" lIns="0" tIns="0" rIns="0" bIns="0" rtlCol="0" anchor="t"/>
-          <a:lstStyle/>
-          <a:p>
-            <a:pPr indent="0" marL="0">
-              <a:buNone/>
-            </a:pPr>
-            <a:r>
-              <a:rPr lang="en-US" sz="950" dirty="0">
-                <a:solidFill>
-                  <a:srgbClr val="24313F"/>
-                </a:solidFill>
-                <a:latin typeface="Malgun Gothic" pitchFamily="34" charset="0"/>
-                <a:ea typeface="Malgun Gothic" pitchFamily="34" charset="-122"/>
-                <a:cs typeface="Malgun Gothic" pitchFamily="34" charset="-120"/>
-              </a:rPr>
-              <a:t>B: 디코딩 → Alpamayo 1.5 → 궤적 (S×64×3) + CoT + 타이밍을 같은 연결로 회신 (&lt; 10 KB)</a:t>
-            </a:r>
-            <a:endParaRPr lang="en-US" sz="950" dirty="0"/>
-          </a:p>
-        </p:txBody>
-      </p:sp>
-      <p:sp>
-        <p:nvSpPr>
-          <p:cNvPr id="24" name="Shape 21"/>
-          <p:cNvSpPr/>
-          <p:nvPr/>
-        </p:nvSpPr>
-        <p:spPr>
-          <a:xfrm>
-            <a:off x="8839733" y="4238843"/>
-            <a:ext cx="173736" cy="0"/>
-          </a:xfrm>
-          <a:prstGeom prst="line">
-            <a:avLst/>
-          </a:prstGeom>
-          <a:noFill/>
-          <a:ln w="15875">
-            <a:solidFill>
-              <a:srgbClr val="6B7A8C"/>
-            </a:solidFill>
-            <a:prstDash val="solid"/>
-            <a:tailEnd type="triangle"/>
-          </a:ln>
-        </p:spPr>
-      </p:sp>
-      <p:sp>
-        <p:nvSpPr>
-          <p:cNvPr id="25" name="Shape 22"/>
-          <p:cNvSpPr/>
-          <p:nvPr/>
-        </p:nvSpPr>
-        <p:spPr>
-          <a:xfrm>
-            <a:off x="9040901" y="3644483"/>
-            <a:ext cx="2602154" cy="1188720"/>
-          </a:xfrm>
-          <a:prstGeom prst="roundRect">
-            <a:avLst>
-              <a:gd name="adj" fmla="val 6154"/>
-            </a:avLst>
-          </a:prstGeom>
-          <a:solidFill>
-            <a:srgbClr val="F3F5F8"/>
-          </a:solidFill>
-          <a:ln w="9525">
-            <a:solidFill>
-              <a:srgbClr val="2A6FDB"/>
-            </a:solidFill>
-            <a:prstDash val="solid"/>
-          </a:ln>
-        </p:spPr>
-      </p:sp>
-      <p:sp>
-        <p:nvSpPr>
-          <p:cNvPr id="26" name="Shape 23"/>
-          <p:cNvSpPr/>
-          <p:nvPr/>
-        </p:nvSpPr>
-        <p:spPr>
-          <a:xfrm>
-            <a:off x="9150629" y="3754211"/>
-            <a:ext cx="310896" cy="310896"/>
-          </a:xfrm>
-          <a:prstGeom prst="ellipse">
-            <a:avLst/>
-          </a:prstGeom>
-          <a:solidFill>
-            <a:srgbClr val="2A6FDB"/>
-          </a:solidFill>
-          <a:ln w="12700">
-            <a:solidFill>
-              <a:srgbClr val="2A6FDB"/>
-            </a:solidFill>
-            <a:prstDash val="solid"/>
-          </a:ln>
-        </p:spPr>
-      </p:sp>
-      <p:sp>
-        <p:nvSpPr>
-          <p:cNvPr id="27" name="Text 24"/>
-          <p:cNvSpPr txBox="1"/>
-          <p:nvPr/>
-        </p:nvSpPr>
-        <p:spPr>
-          <a:xfrm>
-            <a:off x="9150629" y="3754211"/>
-            <a:ext cx="310896" cy="310896"/>
-          </a:xfrm>
-          <a:prstGeom prst="rect">
-            <a:avLst/>
-          </a:prstGeom>
-          <a:noFill/>
-          <a:ln/>
-        </p:spPr>
-        <p:txBody>
-          <a:bodyPr wrap="square" lIns="0" tIns="0" rIns="0" bIns="0" rtlCol="0" anchor="ctr"/>
-          <a:lstStyle/>
-          <a:p>
-            <a:pPr algn="ctr" indent="0" marL="0">
-              <a:buNone/>
-            </a:pPr>
-            <a:r>
-              <a:rPr lang="en-US" sz="1100" b="1" dirty="0">
-                <a:solidFill>
-                  <a:srgbClr val="FFFFFF"/>
-                </a:solidFill>
-                <a:latin typeface="Malgun Gothic" pitchFamily="34" charset="0"/>
-                <a:ea typeface="Malgun Gothic" pitchFamily="34" charset="-122"/>
-                <a:cs typeface="Malgun Gothic" pitchFamily="34" charset="-120"/>
-              </a:rPr>
-              <a:t>4</a:t>
-            </a:r>
-            <a:endParaRPr lang="en-US" sz="1100" dirty="0"/>
-          </a:p>
-        </p:txBody>
-      </p:sp>
-      <p:sp>
-        <p:nvSpPr>
-          <p:cNvPr id="28" name="Text 25"/>
-          <p:cNvSpPr txBox="1"/>
-          <p:nvPr/>
-        </p:nvSpPr>
-        <p:spPr>
-          <a:xfrm>
-            <a:off x="9516389" y="3735923"/>
-            <a:ext cx="2035226" cy="347472"/>
-          </a:xfrm>
-          <a:prstGeom prst="rect">
-            <a:avLst/>
-          </a:prstGeom>
-          <a:noFill/>
-          <a:ln/>
-        </p:spPr>
-        <p:txBody>
-          <a:bodyPr wrap="square" lIns="0" tIns="0" rIns="0" bIns="0" rtlCol="0" anchor="ctr"/>
-          <a:lstStyle/>
-          <a:p>
-            <a:pPr indent="0" marL="0">
-              <a:buNone/>
-            </a:pPr>
-            <a:r>
-              <a:rPr lang="en-US" sz="1150" b="1" dirty="0">
-                <a:solidFill>
-                  <a:srgbClr val="2A6FDB"/>
-                </a:solidFill>
-                <a:latin typeface="Malgun Gothic" pitchFamily="34" charset="0"/>
-                <a:ea typeface="Malgun Gothic" pitchFamily="34" charset="-122"/>
-                <a:cs typeface="Malgun Gothic" pitchFamily="34" charset="-120"/>
-              </a:rPr>
-              <a:t>PID 제어</a:t>
-            </a:r>
-            <a:endParaRPr lang="en-US" sz="1150" dirty="0"/>
-          </a:p>
-        </p:txBody>
-      </p:sp>
-      <p:sp>
-        <p:nvSpPr>
-          <p:cNvPr id="29" name="Text 26"/>
-          <p:cNvSpPr txBox="1"/>
-          <p:nvPr/>
-        </p:nvSpPr>
-        <p:spPr>
-          <a:xfrm>
-            <a:off x="9150629" y="4101683"/>
-            <a:ext cx="2382698" cy="658368"/>
-          </a:xfrm>
-          <a:prstGeom prst="rect">
-            <a:avLst/>
-          </a:prstGeom>
-          <a:noFill/>
-          <a:ln/>
-        </p:spPr>
-        <p:txBody>
-          <a:bodyPr wrap="square" lIns="0" tIns="0" rIns="0" bIns="0" rtlCol="0" anchor="t"/>
-          <a:lstStyle/>
-          <a:p>
-            <a:pPr indent="0" marL="0">
-              <a:buNone/>
-            </a:pPr>
-            <a:r>
-              <a:rPr lang="en-US" sz="950" dirty="0">
-                <a:solidFill>
-                  <a:srgbClr val="24313F"/>
-                </a:solidFill>
-                <a:latin typeface="Malgun Gothic" pitchFamily="34" charset="0"/>
-                <a:ea typeface="Malgun Gothic" pitchFamily="34" charset="-122"/>
-                <a:cs typeface="Malgun Gothic" pitchFamily="34" charset="-120"/>
-              </a:rPr>
-              <a:t>A: 다음 tick부터 새 궤적을 따라 조향·가감속. 궤적 나이 6 s 초과 시 폐기·정지</a:t>
-            </a:r>
-            <a:endParaRPr lang="en-US" sz="950" dirty="0"/>
-          </a:p>
-        </p:txBody>
-      </p:sp>
-      <p:sp>
-        <p:nvSpPr>
-          <p:cNvPr id="30" name="Text 27"/>
-          <p:cNvSpPr txBox="1"/>
-          <p:nvPr/>
-        </p:nvSpPr>
-        <p:spPr>
-          <a:xfrm>
-            <a:off x="548640" y="4970363"/>
-            <a:ext cx="11094415" cy="320040"/>
-          </a:xfrm>
-          <a:prstGeom prst="rect">
-            <a:avLst/>
-          </a:prstGeom>
-          <a:noFill/>
-          <a:ln/>
-        </p:spPr>
-        <p:txBody>
-          <a:bodyPr wrap="square" lIns="0" tIns="0" rIns="0" bIns="0" rtlCol="0" anchor="t"/>
-          <a:lstStyle/>
-          <a:p>
-            <a:pPr indent="0" marL="0">
-              <a:buNone/>
-            </a:pPr>
-            <a:r>
-              <a:rPr lang="en-US" sz="1000" dirty="0">
-                <a:solidFill>
-                  <a:srgbClr val="6B7A8C"/>
-                </a:solidFill>
-                <a:latin typeface="Malgun Gothic" pitchFamily="34" charset="0"/>
-                <a:ea typeface="Malgun Gothic" pitchFamily="34" charset="-122"/>
-                <a:cs typeface="Malgun Gothic" pitchFamily="34" charset="-120"/>
-              </a:rPr>
-              <a:t>점선 = 운영자 SSH/DCV 접속과 파일 복사(rsync/scp, open-loop 데이터·프로파일 CSV). 실시간 경로는 실선뿐이며 CARLA 포트는 A 밖으로 열리지 않는다.</a:t>
-            </a:r>
-            <a:endParaRPr lang="en-US" sz="1000" dirty="0"/>
-          </a:p>
-        </p:txBody>
-      </p:sp>
+        </p:spPr>
+      </p:pic>
     </p:spTree>
   </p:cSld>
   <p:clrMapOvr>

--- a/docs/distributed/demo-overview.pptx
+++ b/docs/distributed/demo-overview.pptx
@@ -7651,7 +7651,7 @@
                 <a:ea typeface="Malgun Gothic" pitchFamily="34" charset="-122"/>
                 <a:cs typeface="Malgun Gothic" pitchFamily="34" charset="-120"/>
               </a:rPr>
-              <a:t>CARLA의 x86 요구와 Alpamayo의 대용량 VRAM 요구를 서로 다른 인스턴스로 나눠도 closed-loop가 성립한다</a:t>
+              <a:t>시뮬레이터와 추론 모델을 서로 다른 인스턴스에 두고 gRPC로 연결해도 closed-loop 테스트가 성립한다</a:t>
             </a:r>
             <a:endParaRPr lang="en-US" sz="1400" dirty="0"/>
           </a:p>
@@ -7743,7 +7743,7 @@
         </p:nvSpPr>
         <p:spPr>
           <a:xfrm>
-            <a:off x="548640" y="1371600"/>
+            <a:off x="548640" y="1463040"/>
             <a:ext cx="822960" cy="822960"/>
           </a:xfrm>
           <a:prstGeom prst="rect">
@@ -7782,8 +7782,8 @@
         </p:nvSpPr>
         <p:spPr>
           <a:xfrm>
-            <a:off x="1417320" y="1463040"/>
-            <a:ext cx="4404208" cy="384048"/>
+            <a:off x="1417320" y="1554480"/>
+            <a:ext cx="2585618" cy="384048"/>
           </a:xfrm>
           <a:prstGeom prst="rect">
             <a:avLst/>
@@ -7807,7 +7807,7 @@
                 <a:ea typeface="Malgun Gothic" pitchFamily="34" charset="-122"/>
                 <a:cs typeface="Malgun Gothic" pitchFamily="34" charset="-120"/>
               </a:rPr>
-              <a:t>요구사항 분리 입증</a:t>
+              <a:t>분리 환경 closed-loop 테스트 수행</a:t>
             </a:r>
             <a:endParaRPr lang="en-US" sz="1600" dirty="0"/>
           </a:p>
@@ -7821,8 +7821,8 @@
         </p:nvSpPr>
         <p:spPr>
           <a:xfrm>
-            <a:off x="1417320" y="1901952"/>
-            <a:ext cx="4404208" cy="1709928"/>
+            <a:off x="1417320" y="1993392"/>
+            <a:ext cx="2585618" cy="3767328"/>
           </a:xfrm>
           <a:prstGeom prst="rect">
             <a:avLst/>
@@ -7852,7 +7852,7 @@
                 <a:ea typeface="Malgun Gothic" pitchFamily="34" charset="-122"/>
                 <a:cs typeface="Malgun Gothic" pitchFamily="34" charset="-120"/>
               </a:rPr>
-              <a:t>근거: CARLA(UE4)는 x86 CPU가 필수이지만 GPU는 6 GB면 충분. Alpamayo는 VRAM 24 GB 이상이 필요하지만 CPU 아키텍처에는 무관</a:t>
+              <a:t>시뮬레이터(A)와 추론 서버(B)를 gRPC로 연결해, 모델이 낸 궤적으로 CARLA 차량이 실제로 주행하는 closed-loop를 확인했다</a:t>
             </a:r>
             <a:endParaRPr lang="en-US" sz="1250" dirty="0"/>
           </a:p>
@@ -7875,110 +7875,10 @@
                 <a:ea typeface="Malgun Gothic" pitchFamily="34" charset="-122"/>
                 <a:cs typeface="Malgun Gothic" pitchFamily="34" charset="-120"/>
               </a:rPr>
-              <a:t>효과: 같은 머신에 두던 제약(4-bit 양자화, OOM-free 대책, venv 3개)이 사라진다</a:t>
+              <a:t>navigation(CFG)과 VQA도 같은 요청/응답 경로로 동작한다</a:t>
             </a:r>
             <a:endParaRPr lang="en-US" sz="1250" dirty="0"/>
           </a:p>
-        </p:txBody>
-      </p:sp>
-      <p:sp>
-        <p:nvSpPr>
-          <p:cNvPr id="9" name="Text 7"/>
-          <p:cNvSpPr txBox="1"/>
-          <p:nvPr/>
-        </p:nvSpPr>
-        <p:spPr>
-          <a:xfrm>
-            <a:off x="6370168" y="1371600"/>
-            <a:ext cx="822960" cy="822960"/>
-          </a:xfrm>
-          <a:prstGeom prst="rect">
-            <a:avLst/>
-          </a:prstGeom>
-          <a:noFill/>
-          <a:ln/>
-        </p:spPr>
-        <p:txBody>
-          <a:bodyPr wrap="square" lIns="0" tIns="0" rIns="0" bIns="0" rtlCol="0" anchor="t"/>
-          <a:lstStyle/>
-          <a:p>
-            <a:pPr indent="0" marL="0">
-              <a:buNone/>
-            </a:pPr>
-            <a:r>
-              <a:rPr lang="en-US" sz="4400" b="1" dirty="0">
-                <a:solidFill>
-                  <a:srgbClr val="E0762B"/>
-                </a:solidFill>
-                <a:latin typeface="Malgun Gothic" pitchFamily="34" charset="0"/>
-                <a:ea typeface="Malgun Gothic" pitchFamily="34" charset="-122"/>
-                <a:cs typeface="Malgun Gothic" pitchFamily="34" charset="-120"/>
-              </a:rPr>
-              <a:t>2</a:t>
-            </a:r>
-            <a:endParaRPr lang="en-US" sz="4400" dirty="0"/>
-          </a:p>
-        </p:txBody>
-      </p:sp>
-      <p:sp>
-        <p:nvSpPr>
-          <p:cNvPr id="10" name="Text 8"/>
-          <p:cNvSpPr txBox="1"/>
-          <p:nvPr/>
-        </p:nvSpPr>
-        <p:spPr>
-          <a:xfrm>
-            <a:off x="7238848" y="1463040"/>
-            <a:ext cx="4404208" cy="384048"/>
-          </a:xfrm>
-          <a:prstGeom prst="rect">
-            <a:avLst/>
-          </a:prstGeom>
-          <a:noFill/>
-          <a:ln/>
-        </p:spPr>
-        <p:txBody>
-          <a:bodyPr wrap="square" lIns="0" tIns="0" rIns="0" bIns="0" rtlCol="0" anchor="ctr"/>
-          <a:lstStyle/>
-          <a:p>
-            <a:pPr indent="0" marL="0">
-              <a:buNone/>
-            </a:pPr>
-            <a:r>
-              <a:rPr lang="en-US" sz="1600" b="1" dirty="0">
-                <a:solidFill>
-                  <a:srgbClr val="1B2A41"/>
-                </a:solidFill>
-                <a:latin typeface="Malgun Gothic" pitchFamily="34" charset="0"/>
-                <a:ea typeface="Malgun Gothic" pitchFamily="34" charset="-122"/>
-                <a:cs typeface="Malgun Gothic" pitchFamily="34" charset="-120"/>
-              </a:rPr>
-              <a:t>인스턴스 선택 유연성</a:t>
-            </a:r>
-            <a:endParaRPr lang="en-US" sz="1600" dirty="0"/>
-          </a:p>
-        </p:txBody>
-      </p:sp>
-      <p:sp>
-        <p:nvSpPr>
-          <p:cNvPr id="11" name="Text 9"/>
-          <p:cNvSpPr txBox="1"/>
-          <p:nvPr/>
-        </p:nvSpPr>
-        <p:spPr>
-          <a:xfrm>
-            <a:off x="7238848" y="1901952"/>
-            <a:ext cx="4404208" cy="1709928"/>
-          </a:xfrm>
-          <a:prstGeom prst="rect">
-            <a:avLst/>
-          </a:prstGeom>
-          <a:noFill/>
-          <a:ln/>
-        </p:spPr>
-        <p:txBody>
-          <a:bodyPr wrap="square" lIns="0" tIns="0" rIns="0" bIns="0" rtlCol="0" anchor="t"/>
-          <a:lstStyle/>
           <a:p>
             <a:pPr indent="0" marL="0">
               <a:lnSpc>
@@ -7998,10 +7898,110 @@
                 <a:ea typeface="Malgun Gothic" pitchFamily="34" charset="-122"/>
                 <a:cs typeface="Malgun Gothic" pitchFamily="34" charset="-120"/>
               </a:rPr>
-              <a:t>근거: 추론 호스트는 x86/ARM과 무관하게 VRAM 기준으로만 고른다. 시뮬레이터 호스트는 그대로</a:t>
+              <a:t>루프·PID·UI 코드는 업스트림 그대로이고 어댑터만 원격으로 바뀌었다</a:t>
             </a:r>
             <a:endParaRPr lang="en-US" sz="1250" dirty="0"/>
           </a:p>
+        </p:txBody>
+      </p:sp>
+      <p:sp>
+        <p:nvSpPr>
+          <p:cNvPr id="9" name="Text 7"/>
+          <p:cNvSpPr txBox="1"/>
+          <p:nvPr/>
+        </p:nvSpPr>
+        <p:spPr>
+          <a:xfrm>
+            <a:off x="4368698" y="1463040"/>
+            <a:ext cx="822960" cy="822960"/>
+          </a:xfrm>
+          <a:prstGeom prst="rect">
+            <a:avLst/>
+          </a:prstGeom>
+          <a:noFill/>
+          <a:ln/>
+        </p:spPr>
+        <p:txBody>
+          <a:bodyPr wrap="square" lIns="0" tIns="0" rIns="0" bIns="0" rtlCol="0" anchor="t"/>
+          <a:lstStyle/>
+          <a:p>
+            <a:pPr indent="0" marL="0">
+              <a:buNone/>
+            </a:pPr>
+            <a:r>
+              <a:rPr lang="en-US" sz="4400" b="1" dirty="0">
+                <a:solidFill>
+                  <a:srgbClr val="E0762B"/>
+                </a:solidFill>
+                <a:latin typeface="Malgun Gothic" pitchFamily="34" charset="0"/>
+                <a:ea typeface="Malgun Gothic" pitchFamily="34" charset="-122"/>
+                <a:cs typeface="Malgun Gothic" pitchFamily="34" charset="-120"/>
+              </a:rPr>
+              <a:t>2</a:t>
+            </a:r>
+            <a:endParaRPr lang="en-US" sz="4400" dirty="0"/>
+          </a:p>
+        </p:txBody>
+      </p:sp>
+      <p:sp>
+        <p:nvSpPr>
+          <p:cNvPr id="10" name="Text 8"/>
+          <p:cNvSpPr txBox="1"/>
+          <p:nvPr/>
+        </p:nvSpPr>
+        <p:spPr>
+          <a:xfrm>
+            <a:off x="5237378" y="1554480"/>
+            <a:ext cx="2585618" cy="384048"/>
+          </a:xfrm>
+          <a:prstGeom prst="rect">
+            <a:avLst/>
+          </a:prstGeom>
+          <a:noFill/>
+          <a:ln/>
+        </p:spPr>
+        <p:txBody>
+          <a:bodyPr wrap="square" lIns="0" tIns="0" rIns="0" bIns="0" rtlCol="0" anchor="ctr"/>
+          <a:lstStyle/>
+          <a:p>
+            <a:pPr indent="0" marL="0">
+              <a:buNone/>
+            </a:pPr>
+            <a:r>
+              <a:rPr lang="en-US" sz="1600" b="1" dirty="0">
+                <a:solidFill>
+                  <a:srgbClr val="1B2A41"/>
+                </a:solidFill>
+                <a:latin typeface="Malgun Gothic" pitchFamily="34" charset="0"/>
+                <a:ea typeface="Malgun Gothic" pitchFamily="34" charset="-122"/>
+                <a:cs typeface="Malgun Gothic" pitchFamily="34" charset="-120"/>
+              </a:rPr>
+              <a:t>인스턴스 선택 유연성</a:t>
+            </a:r>
+            <a:endParaRPr lang="en-US" sz="1600" dirty="0"/>
+          </a:p>
+        </p:txBody>
+      </p:sp>
+      <p:sp>
+        <p:nvSpPr>
+          <p:cNvPr id="11" name="Text 9"/>
+          <p:cNvSpPr txBox="1"/>
+          <p:nvPr/>
+        </p:nvSpPr>
+        <p:spPr>
+          <a:xfrm>
+            <a:off x="5237378" y="1993392"/>
+            <a:ext cx="2585618" cy="3767328"/>
+          </a:xfrm>
+          <a:prstGeom prst="rect">
+            <a:avLst/>
+          </a:prstGeom>
+          <a:noFill/>
+          <a:ln/>
+        </p:spPr>
+        <p:txBody>
+          <a:bodyPr wrap="square" lIns="0" tIns="0" rIns="0" bIns="0" rtlCol="0" anchor="t"/>
+          <a:lstStyle/>
           <a:p>
             <a:pPr indent="0" marL="0">
               <a:lnSpc>
@@ -8021,110 +8021,10 @@
                 <a:ea typeface="Malgun Gothic" pitchFamily="34" charset="-122"/>
                 <a:cs typeface="Malgun Gothic" pitchFamily="34" charset="-120"/>
               </a:rPr>
-              <a:t>효과: ARM Graviton GPU 인스턴스 검토 가능. Alpamayo 2(7카메라)나 샘플 수·CFG를 늘릴 때 B만 교체</a:t>
+              <a:t>CARLA의 x86 요구와 Alpamayo의 VRAM 요구를 서로 다른 인스턴스로 따로 만족시키면 된다</a:t>
             </a:r>
             <a:endParaRPr lang="en-US" sz="1250" dirty="0"/>
           </a:p>
-        </p:txBody>
-      </p:sp>
-      <p:sp>
-        <p:nvSpPr>
-          <p:cNvPr id="12" name="Text 10"/>
-          <p:cNvSpPr txBox="1"/>
-          <p:nvPr/>
-        </p:nvSpPr>
-        <p:spPr>
-          <a:xfrm>
-            <a:off x="548640" y="3749040"/>
-            <a:ext cx="822960" cy="822960"/>
-          </a:xfrm>
-          <a:prstGeom prst="rect">
-            <a:avLst/>
-          </a:prstGeom>
-          <a:noFill/>
-          <a:ln/>
-        </p:spPr>
-        <p:txBody>
-          <a:bodyPr wrap="square" lIns="0" tIns="0" rIns="0" bIns="0" rtlCol="0" anchor="t"/>
-          <a:lstStyle/>
-          <a:p>
-            <a:pPr indent="0" marL="0">
-              <a:buNone/>
-            </a:pPr>
-            <a:r>
-              <a:rPr lang="en-US" sz="4400" b="1" dirty="0">
-                <a:solidFill>
-                  <a:srgbClr val="2E8B57"/>
-                </a:solidFill>
-                <a:latin typeface="Malgun Gothic" pitchFamily="34" charset="0"/>
-                <a:ea typeface="Malgun Gothic" pitchFamily="34" charset="-122"/>
-                <a:cs typeface="Malgun Gothic" pitchFamily="34" charset="-120"/>
-              </a:rPr>
-              <a:t>3</a:t>
-            </a:r>
-            <a:endParaRPr lang="en-US" sz="4400" dirty="0"/>
-          </a:p>
-        </p:txBody>
-      </p:sp>
-      <p:sp>
-        <p:nvSpPr>
-          <p:cNvPr id="13" name="Text 11"/>
-          <p:cNvSpPr txBox="1"/>
-          <p:nvPr/>
-        </p:nvSpPr>
-        <p:spPr>
-          <a:xfrm>
-            <a:off x="1417320" y="3840480"/>
-            <a:ext cx="4404208" cy="384048"/>
-          </a:xfrm>
-          <a:prstGeom prst="rect">
-            <a:avLst/>
-          </a:prstGeom>
-          <a:noFill/>
-          <a:ln/>
-        </p:spPr>
-        <p:txBody>
-          <a:bodyPr wrap="square" lIns="0" tIns="0" rIns="0" bIns="0" rtlCol="0" anchor="ctr"/>
-          <a:lstStyle/>
-          <a:p>
-            <a:pPr indent="0" marL="0">
-              <a:buNone/>
-            </a:pPr>
-            <a:r>
-              <a:rPr lang="en-US" sz="1600" b="1" dirty="0">
-                <a:solidFill>
-                  <a:srgbClr val="1B2A41"/>
-                </a:solidFill>
-                <a:latin typeface="Malgun Gothic" pitchFamily="34" charset="0"/>
-                <a:ea typeface="Malgun Gothic" pitchFamily="34" charset="-122"/>
-                <a:cs typeface="Malgun Gothic" pitchFamily="34" charset="-120"/>
-              </a:rPr>
-              <a:t>비용 최적화</a:t>
-            </a:r>
-            <a:endParaRPr lang="en-US" sz="1600" dirty="0"/>
-          </a:p>
-        </p:txBody>
-      </p:sp>
-      <p:sp>
-        <p:nvSpPr>
-          <p:cNvPr id="14" name="Text 12"/>
-          <p:cNvSpPr txBox="1"/>
-          <p:nvPr/>
-        </p:nvSpPr>
-        <p:spPr>
-          <a:xfrm>
-            <a:off x="1417320" y="4279392"/>
-            <a:ext cx="4404208" cy="1709928"/>
-          </a:xfrm>
-          <a:prstGeom prst="rect">
-            <a:avLst/>
-          </a:prstGeom>
-          <a:noFill/>
-          <a:ln/>
-        </p:spPr>
-        <p:txBody>
-          <a:bodyPr wrap="square" lIns="0" tIns="0" rIns="0" bIns="0" rtlCol="0" anchor="t"/>
-          <a:lstStyle/>
           <a:p>
             <a:pPr indent="0" marL="0">
               <a:lnSpc>
@@ -8144,7 +8044,7 @@
                 <a:ea typeface="Malgun Gothic" pitchFamily="34" charset="-122"/>
                 <a:cs typeface="Malgun Gothic" pitchFamily="34" charset="-120"/>
               </a:rPr>
-              <a:t>근거: CARLA와 모델을 함께 담을 단일 대형 GPU 인스턴스가 필요 없다. 필요 없는 쪽만 정지 가능</a:t>
+              <a:t>추론 호스트는 VRAM 기준으로만 고른다. ARM GPU 인스턴스도 후보가 된다</a:t>
             </a:r>
             <a:endParaRPr lang="en-US" sz="1250" dirty="0"/>
           </a:p>
@@ -8167,7 +8067,7 @@
                 <a:ea typeface="Malgun Gothic" pitchFamily="34" charset="-122"/>
                 <a:cs typeface="Malgun Gothic" pitchFamily="34" charset="-120"/>
               </a:rPr>
-              <a:t>효과: open-loop·노트북 실험 때는 A 정지, 데이터 수집 때는 B 정지. 요금 비교: [요금표 확인 후 기입]</a:t>
+              <a:t>모델을 키우거나(Alpamayo 2, 7카메라) 샘플 수·CFG를 늘릴 때 B만 교체하고 시뮬레이터 호스트는 그대로 둔다</a:t>
             </a:r>
             <a:endParaRPr lang="en-US" sz="1250" dirty="0"/>
           </a:p>
@@ -8175,13 +8075,13 @@
       </p:sp>
       <p:sp>
         <p:nvSpPr>
-          <p:cNvPr id="15" name="Text 13"/>
-          <p:cNvSpPr txBox="1"/>
-          <p:nvPr/>
-        </p:nvSpPr>
-        <p:spPr>
-          <a:xfrm>
-            <a:off x="6370168" y="3749040"/>
+          <p:cNvPr id="12" name="Text 10"/>
+          <p:cNvSpPr txBox="1"/>
+          <p:nvPr/>
+        </p:nvSpPr>
+        <p:spPr>
+          <a:xfrm>
+            <a:off x="8188757" y="1463040"/>
             <a:ext cx="822960" cy="822960"/>
           </a:xfrm>
           <a:prstGeom prst="rect">
@@ -8200,52 +8100,52 @@
             <a:r>
               <a:rPr lang="en-US" sz="4400" b="1" dirty="0">
                 <a:solidFill>
+                  <a:srgbClr val="2E8B57"/>
+                </a:solidFill>
+                <a:latin typeface="Malgun Gothic" pitchFamily="34" charset="0"/>
+                <a:ea typeface="Malgun Gothic" pitchFamily="34" charset="-122"/>
+                <a:cs typeface="Malgun Gothic" pitchFamily="34" charset="-120"/>
+              </a:rPr>
+              <a:t>3</a:t>
+            </a:r>
+            <a:endParaRPr lang="en-US" sz="4400" dirty="0"/>
+          </a:p>
+        </p:txBody>
+      </p:sp>
+      <p:sp>
+        <p:nvSpPr>
+          <p:cNvPr id="13" name="Text 11"/>
+          <p:cNvSpPr txBox="1"/>
+          <p:nvPr/>
+        </p:nvSpPr>
+        <p:spPr>
+          <a:xfrm>
+            <a:off x="9057437" y="1554480"/>
+            <a:ext cx="2585618" cy="384048"/>
+          </a:xfrm>
+          <a:prstGeom prst="rect">
+            <a:avLst/>
+          </a:prstGeom>
+          <a:noFill/>
+          <a:ln/>
+        </p:spPr>
+        <p:txBody>
+          <a:bodyPr wrap="square" lIns="0" tIns="0" rIns="0" bIns="0" rtlCol="0" anchor="ctr"/>
+          <a:lstStyle/>
+          <a:p>
+            <a:pPr indent="0" marL="0">
+              <a:buNone/>
+            </a:pPr>
+            <a:r>
+              <a:rPr lang="en-US" sz="1600" b="1" dirty="0">
+                <a:solidFill>
                   <a:srgbClr val="1B2A41"/>
                 </a:solidFill>
                 <a:latin typeface="Malgun Gothic" pitchFamily="34" charset="0"/>
                 <a:ea typeface="Malgun Gothic" pitchFamily="34" charset="-122"/>
                 <a:cs typeface="Malgun Gothic" pitchFamily="34" charset="-120"/>
               </a:rPr>
-              <a:t>4</a:t>
-            </a:r>
-            <a:endParaRPr lang="en-US" sz="4400" dirty="0"/>
-          </a:p>
-        </p:txBody>
-      </p:sp>
-      <p:sp>
-        <p:nvSpPr>
-          <p:cNvPr id="16" name="Text 14"/>
-          <p:cNvSpPr txBox="1"/>
-          <p:nvPr/>
-        </p:nvSpPr>
-        <p:spPr>
-          <a:xfrm>
-            <a:off x="7238848" y="3840480"/>
-            <a:ext cx="4404208" cy="384048"/>
-          </a:xfrm>
-          <a:prstGeom prst="rect">
-            <a:avLst/>
-          </a:prstGeom>
-          <a:noFill/>
-          <a:ln/>
-        </p:spPr>
-        <p:txBody>
-          <a:bodyPr wrap="square" lIns="0" tIns="0" rIns="0" bIns="0" rtlCol="0" anchor="ctr"/>
-          <a:lstStyle/>
-          <a:p>
-            <a:pPr indent="0" marL="0">
-              <a:buNone/>
-            </a:pPr>
-            <a:r>
-              <a:rPr lang="en-US" sz="1600" b="1" dirty="0">
-                <a:solidFill>
-                  <a:srgbClr val="1B2A41"/>
-                </a:solidFill>
-                <a:latin typeface="Malgun Gothic" pitchFamily="34" charset="0"/>
-                <a:ea typeface="Malgun Gothic" pitchFamily="34" charset="-122"/>
-                <a:cs typeface="Malgun Gothic" pitchFamily="34" charset="-120"/>
-              </a:rPr>
-              <a:t>운영·확장·업스트림 추적</a:t>
+              <a:t>비용 최적화</a:t>
             </a:r>
             <a:endParaRPr lang="en-US" sz="1600" dirty="0"/>
           </a:p>
@@ -8253,14 +8153,14 @@
       </p:sp>
       <p:sp>
         <p:nvSpPr>
-          <p:cNvPr id="17" name="Text 15"/>
-          <p:cNvSpPr txBox="1"/>
-          <p:nvPr/>
-        </p:nvSpPr>
-        <p:spPr>
-          <a:xfrm>
-            <a:off x="7238848" y="4279392"/>
-            <a:ext cx="4404208" cy="1709928"/>
+          <p:cNvPr id="14" name="Text 12"/>
+          <p:cNvSpPr txBox="1"/>
+          <p:nvPr/>
+        </p:nvSpPr>
+        <p:spPr>
+          <a:xfrm>
+            <a:off x="9057437" y="1993392"/>
+            <a:ext cx="2585618" cy="3767328"/>
           </a:xfrm>
           <a:prstGeom prst="rect">
             <a:avLst/>
@@ -8290,7 +8190,7 @@
                 <a:ea typeface="Malgun Gothic" pitchFamily="34" charset="-122"/>
                 <a:cs typeface="Malgun Gothic" pitchFamily="34" charset="-120"/>
               </a:rPr>
-              <a:t>근거: 모델을 한 번만 로드해 상주. 추론 인터페이스가 .proto 계약으로 고정. 루프·PID·UI 코드는 업스트림과 같고 --inference-server 플래그만 추가</a:t>
+              <a:t>두 요구를 모두 만족하는 대형 단일 GPU 인스턴스가 필요 없다</a:t>
             </a:r>
             <a:endParaRPr lang="en-US" sz="1250" dirty="0"/>
           </a:p>
@@ -8313,7 +8213,30 @@
                 <a:ea typeface="Malgun Gothic" pitchFamily="34" charset="-122"/>
                 <a:cs typeface="Malgun Gothic" pitchFamily="34" charset="-120"/>
               </a:rPr>
-              <a:t>효과: 클라이언트·CARLA 재시작 시 모델 재로드 없음. 다른 모델·시뮬레이터 연결과 업스트림 변경 반영이 쉽다</a:t>
+              <a:t>필요 없는 쪽만 정지한다. open-loop·노트북 실험 때는 A, 데이터 수집 때는 B</a:t>
+            </a:r>
+            <a:endParaRPr lang="en-US" sz="1250" dirty="0"/>
+          </a:p>
+          <a:p>
+            <a:pPr indent="0" marL="0">
+              <a:lnSpc>
+                <a:spcPct val="115000"/>
+              </a:lnSpc>
+              <a:spcAft>
+                <a:spcPts val="800"/>
+              </a:spcAft>
+              <a:buNone/>
+            </a:pPr>
+            <a:r>
+              <a:rPr lang="en-US" sz="1250" dirty="0">
+                <a:solidFill>
+                  <a:srgbClr val="24313F"/>
+                </a:solidFill>
+                <a:latin typeface="Malgun Gothic" pitchFamily="34" charset="0"/>
+                <a:ea typeface="Malgun Gothic" pitchFamily="34" charset="-122"/>
+                <a:cs typeface="Malgun Gothic" pitchFamily="34" charset="-120"/>
+              </a:rPr>
+              <a:t>요금 비교: [요금표 확인 후 기입]</a:t>
             </a:r>
             <a:endParaRPr lang="en-US" sz="1250" dirty="0"/>
           </a:p>

--- a/docs/distributed/demo-overview.pptx
+++ b/docs/distributed/demo-overview.pptx
@@ -4004,7 +4004,212 @@
         <p:spPr>
           <a:xfrm>
             <a:off x="548640" y="1801368"/>
-            <a:ext cx="5318608" cy="2359152"/>
+            <a:ext cx="5318608" cy="2450592"/>
+          </a:xfrm>
+          <a:prstGeom prst="rect">
+            <a:avLst/>
+          </a:prstGeom>
+          <a:noFill/>
+          <a:ln/>
+        </p:spPr>
+        <p:txBody>
+          <a:bodyPr wrap="square" lIns="0" tIns="0" rIns="0" bIns="0" rtlCol="0" anchor="t"/>
+          <a:lstStyle/>
+          <a:p>
+            <a:pPr marL="177800" indent="-177800">
+              <a:lnSpc>
+                <a:spcPct val="115000"/>
+              </a:lnSpc>
+              <a:spcAft>
+                <a:spcPts val="500"/>
+              </a:spcAft>
+              <a:buSzPct val="100000"/>
+              <a:buChar char="•"/>
+            </a:pPr>
+            <a:r>
+              <a:rPr lang="en-US" sz="1150" dirty="0">
+                <a:solidFill>
+                  <a:srgbClr val="24313F"/>
+                </a:solidFill>
+                <a:latin typeface="Malgun Gothic" pitchFamily="34" charset="0"/>
+                <a:ea typeface="Malgun Gothic" pitchFamily="34" charset="-122"/>
+                <a:cs typeface="Malgun Gothic" pitchFamily="34" charset="-120"/>
+              </a:rPr>
+              <a:t>창 입력창에  텍스트 | 가중치  형식으로 입력 후 Enter (예: Turn right in 30m | 1.5)</a:t>
+            </a:r>
+            <a:endParaRPr lang="en-US" sz="1150" dirty="0"/>
+          </a:p>
+          <a:p>
+            <a:pPr marL="177800" indent="-177800">
+              <a:lnSpc>
+                <a:spcPct val="115000"/>
+              </a:lnSpc>
+              <a:spcAft>
+                <a:spcPts val="500"/>
+              </a:spcAft>
+              <a:buSzPct val="100000"/>
+              <a:buChar char="•"/>
+            </a:pPr>
+            <a:r>
+              <a:rPr lang="en-US" sz="1150" dirty="0">
+                <a:solidFill>
+                  <a:srgbClr val="24313F"/>
+                </a:solidFill>
+                <a:latin typeface="Malgun Gothic" pitchFamily="34" charset="0"/>
+                <a:ea typeface="Malgun Gothic" pitchFamily="34" charset="-122"/>
+                <a:cs typeface="Malgun Gothic" pitchFamily="34" charset="-120"/>
+              </a:rPr>
+              <a:t>prompt_revision이 1 올라가고, 다음 Predict 요청부터 navigation_text·weight가 실린다</a:t>
+            </a:r>
+            <a:endParaRPr lang="en-US" sz="1150" dirty="0"/>
+          </a:p>
+          <a:p>
+            <a:pPr marL="177800" indent="-177800">
+              <a:lnSpc>
+                <a:spcPct val="115000"/>
+              </a:lnSpc>
+              <a:spcAft>
+                <a:spcPts val="500"/>
+              </a:spcAft>
+              <a:buSzPct val="100000"/>
+              <a:buChar char="•"/>
+            </a:pPr>
+            <a:r>
+              <a:rPr lang="en-US" sz="1150" dirty="0">
+                <a:solidFill>
+                  <a:srgbClr val="24313F"/>
+                </a:solidFill>
+                <a:latin typeface="Malgun Gothic" pitchFamily="34" charset="0"/>
+                <a:ea typeface="Malgun Gothic" pitchFamily="34" charset="-122"/>
+                <a:cs typeface="Malgun Gothic" pitchFamily="34" charset="-120"/>
+              </a:rPr>
+              <a:t>변경 확인: 패널 Active nav 줄과 터미널 Navigation updated. 반영은 다음 추론부터(1~3 s 뒤)</a:t>
+            </a:r>
+            <a:endParaRPr lang="en-US" sz="1150" dirty="0"/>
+          </a:p>
+          <a:p>
+            <a:pPr marL="177800" indent="-177800">
+              <a:lnSpc>
+                <a:spcPct val="115000"/>
+              </a:lnSpc>
+              <a:spcAft>
+                <a:spcPts val="500"/>
+              </a:spcAft>
+              <a:buSzPct val="100000"/>
+              <a:buChar char="•"/>
+            </a:pPr>
+            <a:r>
+              <a:rPr lang="en-US" sz="1150" dirty="0">
+                <a:solidFill>
+                  <a:srgbClr val="24313F"/>
+                </a:solidFill>
+                <a:latin typeface="Malgun Gothic" pitchFamily="34" charset="0"/>
+                <a:ea typeface="Malgun Gothic" pitchFamily="34" charset="-122"/>
+                <a:cs typeface="Malgun Gothic" pitchFamily="34" charset="-120"/>
+              </a:rPr>
+              <a:t>지시는 지울 때까지 매 추론에 들어간다. 회전을 마치면 입력창에 | 1.0 을 넣고 Enter로 해제</a:t>
+            </a:r>
+            <a:endParaRPr lang="en-US" sz="1150" dirty="0"/>
+          </a:p>
+          <a:p>
+            <a:pPr marL="177800" indent="-177800">
+              <a:lnSpc>
+                <a:spcPct val="115000"/>
+              </a:lnSpc>
+              <a:spcAft>
+                <a:spcPts val="500"/>
+              </a:spcAft>
+              <a:buSzPct val="100000"/>
+              <a:buChar char="•"/>
+            </a:pPr>
+            <a:r>
+              <a:rPr lang="en-US" sz="1150" dirty="0">
+                <a:solidFill>
+                  <a:srgbClr val="24313F"/>
+                </a:solidFill>
+                <a:latin typeface="Malgun Gothic" pitchFamily="34" charset="0"/>
+                <a:ea typeface="Malgun Gothic" pitchFamily="34" charset="-122"/>
+                <a:cs typeface="Malgun Gothic" pitchFamily="34" charset="-120"/>
+              </a:rPr>
+              <a:t>CFG 가중치 = 지시를 얼마나 강하게 따를지. 1.0 기본, 1.5 권장. 클수록 지시 우선, VRAM 증가</a:t>
+            </a:r>
+            <a:endParaRPr lang="en-US" sz="1150" dirty="0"/>
+          </a:p>
+          <a:p>
+            <a:pPr marL="177800" indent="-177800">
+              <a:lnSpc>
+                <a:spcPct val="115000"/>
+              </a:lnSpc>
+              <a:spcAft>
+                <a:spcPts val="500"/>
+              </a:spcAft>
+              <a:buSzPct val="100000"/>
+              <a:buChar char="•"/>
+            </a:pPr>
+            <a:r>
+              <a:rPr lang="en-US" sz="1150" dirty="0">
+                <a:solidFill>
+                  <a:srgbClr val="24313F"/>
+                </a:solidFill>
+                <a:latin typeface="Malgun Gothic" pitchFamily="34" charset="0"/>
+                <a:ea typeface="Malgun Gothic" pitchFamily="34" charset="-122"/>
+                <a:cs typeface="Malgun Gothic" pitchFamily="34" charset="-120"/>
+              </a:rPr>
+              <a:t>비교 시연: 같은 장면에서 가중치 1.0 vs 1.5의 궤적 차이</a:t>
+            </a:r>
+            <a:endParaRPr lang="en-US" sz="1150" dirty="0"/>
+          </a:p>
+        </p:txBody>
+      </p:sp>
+      <p:sp>
+        <p:nvSpPr>
+          <p:cNvPr id="8" name="Text 6"/>
+          <p:cNvSpPr txBox="1"/>
+          <p:nvPr/>
+        </p:nvSpPr>
+        <p:spPr>
+          <a:xfrm>
+            <a:off x="6324448" y="1417320"/>
+            <a:ext cx="5318608" cy="347472"/>
+          </a:xfrm>
+          <a:prstGeom prst="rect">
+            <a:avLst/>
+          </a:prstGeom>
+          <a:noFill/>
+          <a:ln/>
+        </p:spPr>
+        <p:txBody>
+          <a:bodyPr wrap="square" lIns="0" tIns="0" rIns="0" bIns="0" rtlCol="0" anchor="ctr"/>
+          <a:lstStyle/>
+          <a:p>
+            <a:pPr indent="0" marL="0">
+              <a:buNone/>
+            </a:pPr>
+            <a:r>
+              <a:rPr lang="en-US" sz="1400" b="1" dirty="0">
+                <a:solidFill>
+                  <a:srgbClr val="E0762B"/>
+                </a:solidFill>
+                <a:latin typeface="Malgun Gothic" pitchFamily="34" charset="0"/>
+                <a:ea typeface="Malgun Gothic" pitchFamily="34" charset="-122"/>
+                <a:cs typeface="Malgun Gothic" pitchFamily="34" charset="-120"/>
+              </a:rPr>
+              <a:t>VQA (정차 후)</a:t>
+            </a:r>
+            <a:endParaRPr lang="en-US" sz="1400" dirty="0"/>
+          </a:p>
+        </p:txBody>
+      </p:sp>
+      <p:sp>
+        <p:nvSpPr>
+          <p:cNvPr id="9" name="Text 7"/>
+          <p:cNvSpPr txBox="1"/>
+          <p:nvPr/>
+        </p:nvSpPr>
+        <p:spPr>
+          <a:xfrm>
+            <a:off x="6324448" y="1801368"/>
+            <a:ext cx="5318608" cy="2450592"/>
           </a:xfrm>
           <a:prstGeom prst="rect">
             <a:avLst/>
@@ -4035,7 +4240,7 @@
                 <a:ea typeface="Malgun Gothic" pitchFamily="34" charset="-122"/>
                 <a:cs typeface="Malgun Gothic" pitchFamily="34" charset="-120"/>
               </a:rPr>
-              <a:t>창 입력창에  텍스트 | 가중치  형식으로 입력 후 Enter (예: Turn right in 30m | 1.5)</a:t>
+              <a:t>--mode vqa 로 시작하거나 창에서 질문 입력. 차량은 정지(브레이크)한 채 질문한다</a:t>
             </a:r>
             <a:endParaRPr lang="en-US" sz="1200" dirty="0"/>
           </a:p>
@@ -4059,7 +4264,7 @@
                 <a:ea typeface="Malgun Gothic" pitchFamily="34" charset="-122"/>
                 <a:cs typeface="Malgun Gothic" pitchFamily="34" charset="-120"/>
               </a:rPr>
-              <a:t>prompt_revision이 1 올라가고, 다음 Predict 요청부터 navigation_text·weight가 실린다</a:t>
+              <a:t>AnswerQuestion 요청 1회 → 답 텍스트가 패널과 터미널에 표시 (예: What is ahead?)</a:t>
             </a:r>
             <a:endParaRPr lang="en-US" sz="1200" dirty="0"/>
           </a:p>
@@ -4083,7 +4288,7 @@
                 <a:ea typeface="Malgun Gothic" pitchFamily="34" charset="-122"/>
                 <a:cs typeface="Malgun Gothic" pitchFamily="34" charset="-120"/>
               </a:rPr>
-              <a:t>CFG 가중치 = 지시를 얼마나 강하게 따를지. 1.0 기본, 1.5 권장. 클수록 지시 우선, VRAM 증가</a:t>
+              <a:t>질문을 바꾸면 다시 1회 요청. 궤적은 생성하지 않는다</a:t>
             </a:r>
             <a:endParaRPr lang="en-US" sz="1200" dirty="0"/>
           </a:p>
@@ -4107,7 +4312,7 @@
                 <a:ea typeface="Malgun Gothic" pitchFamily="34" charset="-122"/>
                 <a:cs typeface="Malgun Gothic" pitchFamily="34" charset="-120"/>
               </a:rPr>
-              <a:t>비교 시연: 같은 장면에서 가중치 1.0 vs 1.5의 궤적 차이. 샘플을 여러 개(--num-traj-samples 4) 뽑으면 후보가 흰 선으로 함께 그려진다</a:t>
+              <a:t>업스트림과 같은 동작. 주행 중 질문·답은 범위 밖</a:t>
             </a:r>
             <a:endParaRPr lang="en-US" sz="1200" dirty="0"/>
           </a:p>
@@ -4115,170 +4320,13 @@
       </p:sp>
       <p:sp>
         <p:nvSpPr>
-          <p:cNvPr id="8" name="Text 6"/>
-          <p:cNvSpPr txBox="1"/>
-          <p:nvPr/>
-        </p:nvSpPr>
-        <p:spPr>
-          <a:xfrm>
-            <a:off x="6324448" y="1417320"/>
-            <a:ext cx="5318608" cy="347472"/>
-          </a:xfrm>
-          <a:prstGeom prst="rect">
-            <a:avLst/>
-          </a:prstGeom>
-          <a:noFill/>
-          <a:ln/>
-        </p:spPr>
-        <p:txBody>
-          <a:bodyPr wrap="square" lIns="0" tIns="0" rIns="0" bIns="0" rtlCol="0" anchor="ctr"/>
-          <a:lstStyle/>
-          <a:p>
-            <a:pPr indent="0" marL="0">
-              <a:buNone/>
-            </a:pPr>
-            <a:r>
-              <a:rPr lang="en-US" sz="1400" b="1" dirty="0">
-                <a:solidFill>
-                  <a:srgbClr val="E0762B"/>
-                </a:solidFill>
-                <a:latin typeface="Malgun Gothic" pitchFamily="34" charset="0"/>
-                <a:ea typeface="Malgun Gothic" pitchFamily="34" charset="-122"/>
-                <a:cs typeface="Malgun Gothic" pitchFamily="34" charset="-120"/>
-              </a:rPr>
-              <a:t>VQA (정차 후)</a:t>
-            </a:r>
-            <a:endParaRPr lang="en-US" sz="1400" dirty="0"/>
-          </a:p>
-        </p:txBody>
-      </p:sp>
-      <p:sp>
-        <p:nvSpPr>
-          <p:cNvPr id="9" name="Text 7"/>
-          <p:cNvSpPr txBox="1"/>
-          <p:nvPr/>
-        </p:nvSpPr>
-        <p:spPr>
-          <a:xfrm>
-            <a:off x="6324448" y="1801368"/>
-            <a:ext cx="5318608" cy="2359152"/>
-          </a:xfrm>
-          <a:prstGeom prst="rect">
-            <a:avLst/>
-          </a:prstGeom>
-          <a:noFill/>
-          <a:ln/>
-        </p:spPr>
-        <p:txBody>
-          <a:bodyPr wrap="square" lIns="0" tIns="0" rIns="0" bIns="0" rtlCol="0" anchor="t"/>
-          <a:lstStyle/>
-          <a:p>
-            <a:pPr marL="177800" indent="-177800">
-              <a:lnSpc>
-                <a:spcPct val="115000"/>
-              </a:lnSpc>
-              <a:spcAft>
-                <a:spcPts val="700"/>
-              </a:spcAft>
-              <a:buSzPct val="100000"/>
-              <a:buChar char="•"/>
-            </a:pPr>
-            <a:r>
-              <a:rPr lang="en-US" sz="1200" dirty="0">
-                <a:solidFill>
-                  <a:srgbClr val="24313F"/>
-                </a:solidFill>
-                <a:latin typeface="Malgun Gothic" pitchFamily="34" charset="0"/>
-                <a:ea typeface="Malgun Gothic" pitchFamily="34" charset="-122"/>
-                <a:cs typeface="Malgun Gothic" pitchFamily="34" charset="-120"/>
-              </a:rPr>
-              <a:t>--mode vqa 로 시작하거나 창에서 질문 입력. 차량은 정지(브레이크)한 채 질문한다</a:t>
-            </a:r>
-            <a:endParaRPr lang="en-US" sz="1200" dirty="0"/>
-          </a:p>
-          <a:p>
-            <a:pPr marL="177800" indent="-177800">
-              <a:lnSpc>
-                <a:spcPct val="115000"/>
-              </a:lnSpc>
-              <a:spcAft>
-                <a:spcPts val="700"/>
-              </a:spcAft>
-              <a:buSzPct val="100000"/>
-              <a:buChar char="•"/>
-            </a:pPr>
-            <a:r>
-              <a:rPr lang="en-US" sz="1200" dirty="0">
-                <a:solidFill>
-                  <a:srgbClr val="24313F"/>
-                </a:solidFill>
-                <a:latin typeface="Malgun Gothic" pitchFamily="34" charset="0"/>
-                <a:ea typeface="Malgun Gothic" pitchFamily="34" charset="-122"/>
-                <a:cs typeface="Malgun Gothic" pitchFamily="34" charset="-120"/>
-              </a:rPr>
-              <a:t>AnswerQuestion 요청 1회 → 답 텍스트가 패널과 터미널에 표시 (예: What is ahead?)</a:t>
-            </a:r>
-            <a:endParaRPr lang="en-US" sz="1200" dirty="0"/>
-          </a:p>
-          <a:p>
-            <a:pPr marL="177800" indent="-177800">
-              <a:lnSpc>
-                <a:spcPct val="115000"/>
-              </a:lnSpc>
-              <a:spcAft>
-                <a:spcPts val="700"/>
-              </a:spcAft>
-              <a:buSzPct val="100000"/>
-              <a:buChar char="•"/>
-            </a:pPr>
-            <a:r>
-              <a:rPr lang="en-US" sz="1200" dirty="0">
-                <a:solidFill>
-                  <a:srgbClr val="24313F"/>
-                </a:solidFill>
-                <a:latin typeface="Malgun Gothic" pitchFamily="34" charset="0"/>
-                <a:ea typeface="Malgun Gothic" pitchFamily="34" charset="-122"/>
-                <a:cs typeface="Malgun Gothic" pitchFamily="34" charset="-120"/>
-              </a:rPr>
-              <a:t>질문을 바꾸면 다시 1회 요청. 궤적은 생성하지 않는다</a:t>
-            </a:r>
-            <a:endParaRPr lang="en-US" sz="1200" dirty="0"/>
-          </a:p>
-          <a:p>
-            <a:pPr marL="177800" indent="-177800">
-              <a:lnSpc>
-                <a:spcPct val="115000"/>
-              </a:lnSpc>
-              <a:spcAft>
-                <a:spcPts val="700"/>
-              </a:spcAft>
-              <a:buSzPct val="100000"/>
-              <a:buChar char="•"/>
-            </a:pPr>
-            <a:r>
-              <a:rPr lang="en-US" sz="1200" dirty="0">
-                <a:solidFill>
-                  <a:srgbClr val="24313F"/>
-                </a:solidFill>
-                <a:latin typeface="Malgun Gothic" pitchFamily="34" charset="0"/>
-                <a:ea typeface="Malgun Gothic" pitchFamily="34" charset="-122"/>
-                <a:cs typeface="Malgun Gothic" pitchFamily="34" charset="-120"/>
-              </a:rPr>
-              <a:t>업스트림과 같은 동작. 주행 중 질문·답은 범위 밖</a:t>
-            </a:r>
-            <a:endParaRPr lang="en-US" sz="1200" dirty="0"/>
-          </a:p>
-        </p:txBody>
-      </p:sp>
-      <p:sp>
-        <p:nvSpPr>
           <p:cNvPr id="10" name="Text 8"/>
           <p:cNvSpPr txBox="1"/>
           <p:nvPr/>
         </p:nvSpPr>
         <p:spPr>
           <a:xfrm>
-            <a:off x="548640" y="4343400"/>
+            <a:off x="548640" y="4663440"/>
             <a:ext cx="3657600" cy="274320"/>
           </a:xfrm>
           <a:prstGeom prst="rect">
@@ -4317,12 +4365,12 @@
         </p:nvSpPr>
         <p:spPr>
           <a:xfrm>
-            <a:off x="548640" y="4663440"/>
-            <a:ext cx="2533574" cy="548640"/>
+            <a:off x="548640" y="4956048"/>
+            <a:ext cx="2533574" cy="502920"/>
           </a:xfrm>
           <a:prstGeom prst="roundRect">
             <a:avLst>
-              <a:gd name="adj" fmla="val 58333"/>
+              <a:gd name="adj" fmla="val 63636"/>
             </a:avLst>
           </a:prstGeom>
           <a:solidFill>
@@ -4344,8 +4392,8 @@
         </p:nvSpPr>
         <p:spPr>
           <a:xfrm>
-            <a:off x="685800" y="4663440"/>
-            <a:ext cx="2259254" cy="548640"/>
+            <a:off x="685800" y="4956048"/>
+            <a:ext cx="2259254" cy="502920"/>
           </a:xfrm>
           <a:prstGeom prst="rect">
             <a:avLst/>
@@ -4383,8 +4431,8 @@
         </p:nvSpPr>
         <p:spPr>
           <a:xfrm>
-            <a:off x="548640" y="5285232"/>
-            <a:ext cx="2533574" cy="822960"/>
+            <a:off x="548640" y="5532120"/>
+            <a:ext cx="2533574" cy="731520"/>
           </a:xfrm>
           <a:prstGeom prst="rect">
             <a:avLst/>
@@ -4400,7 +4448,7 @@
               <a:buNone/>
             </a:pPr>
             <a:r>
-              <a:rPr lang="en-US" sz="1050" dirty="0">
+              <a:rPr lang="en-US" sz="1000" dirty="0">
                 <a:solidFill>
                   <a:srgbClr val="24313F"/>
                 </a:solidFill>
@@ -4410,7 +4458,7 @@
               </a:rPr>
               <a:t>텍스트 | 가중치  또는  질문</a:t>
             </a:r>
-            <a:endParaRPr lang="en-US" sz="1050" dirty="0"/>
+            <a:endParaRPr lang="en-US" sz="1000" dirty="0"/>
           </a:p>
         </p:txBody>
       </p:sp>
@@ -4422,7 +4470,7 @@
         </p:nvSpPr>
         <p:spPr>
           <a:xfrm>
-            <a:off x="3127934" y="4937760"/>
+            <a:off x="3127934" y="5207508"/>
             <a:ext cx="228600" cy="0"/>
           </a:xfrm>
           <a:prstGeom prst="line">
@@ -4446,12 +4494,12 @@
         </p:nvSpPr>
         <p:spPr>
           <a:xfrm>
-            <a:off x="3402254" y="4663440"/>
-            <a:ext cx="2533574" cy="548640"/>
+            <a:off x="3402254" y="4956048"/>
+            <a:ext cx="2533574" cy="502920"/>
           </a:xfrm>
           <a:prstGeom prst="roundRect">
             <a:avLst>
-              <a:gd name="adj" fmla="val 58333"/>
+              <a:gd name="adj" fmla="val 63636"/>
             </a:avLst>
           </a:prstGeom>
           <a:solidFill>
@@ -4473,8 +4521,8 @@
         </p:nvSpPr>
         <p:spPr>
           <a:xfrm>
-            <a:off x="3539414" y="4663440"/>
-            <a:ext cx="2259254" cy="548640"/>
+            <a:off x="3539414" y="4956048"/>
+            <a:ext cx="2259254" cy="502920"/>
           </a:xfrm>
           <a:prstGeom prst="rect">
             <a:avLst/>
@@ -4512,8 +4560,8 @@
         </p:nvSpPr>
         <p:spPr>
           <a:xfrm>
-            <a:off x="3402254" y="5285232"/>
-            <a:ext cx="2533574" cy="822960"/>
+            <a:off x="3402254" y="5532120"/>
+            <a:ext cx="2533574" cy="731520"/>
           </a:xfrm>
           <a:prstGeom prst="rect">
             <a:avLst/>
@@ -4529,7 +4577,7 @@
               <a:buNone/>
             </a:pPr>
             <a:r>
-              <a:rPr lang="en-US" sz="1050" dirty="0">
+              <a:rPr lang="en-US" sz="1000" dirty="0">
                 <a:solidFill>
                   <a:srgbClr val="24313F"/>
                 </a:solidFill>
@@ -4539,7 +4587,7 @@
               </a:rPr>
               <a:t>다음 gRPC 요청의 navigation_text / navigation_weight / question 필드</a:t>
             </a:r>
-            <a:endParaRPr lang="en-US" sz="1050" dirty="0"/>
+            <a:endParaRPr lang="en-US" sz="1000" dirty="0"/>
           </a:p>
         </p:txBody>
       </p:sp>
@@ -4551,7 +4599,7 @@
         </p:nvSpPr>
         <p:spPr>
           <a:xfrm>
-            <a:off x="5981548" y="4937760"/>
+            <a:off x="5981548" y="5207508"/>
             <a:ext cx="228600" cy="0"/>
           </a:xfrm>
           <a:prstGeom prst="line">
@@ -4575,12 +4623,12 @@
         </p:nvSpPr>
         <p:spPr>
           <a:xfrm>
-            <a:off x="6255868" y="4663440"/>
-            <a:ext cx="2533574" cy="548640"/>
+            <a:off x="6255868" y="4956048"/>
+            <a:ext cx="2533574" cy="502920"/>
           </a:xfrm>
           <a:prstGeom prst="roundRect">
             <a:avLst>
-              <a:gd name="adj" fmla="val 58333"/>
+              <a:gd name="adj" fmla="val 63636"/>
             </a:avLst>
           </a:prstGeom>
           <a:solidFill>
@@ -4602,8 +4650,8 @@
         </p:nvSpPr>
         <p:spPr>
           <a:xfrm>
-            <a:off x="6393028" y="4663440"/>
-            <a:ext cx="2259254" cy="548640"/>
+            <a:off x="6393028" y="4956048"/>
+            <a:ext cx="2259254" cy="502920"/>
           </a:xfrm>
           <a:prstGeom prst="rect">
             <a:avLst/>
@@ -4641,8 +4689,8 @@
         </p:nvSpPr>
         <p:spPr>
           <a:xfrm>
-            <a:off x="6255868" y="5285232"/>
-            <a:ext cx="2533574" cy="822960"/>
+            <a:off x="6255868" y="5532120"/>
+            <a:ext cx="2533574" cy="731520"/>
           </a:xfrm>
           <a:prstGeom prst="rect">
             <a:avLst/>
@@ -4658,7 +4706,7 @@
               <a:buNone/>
             </a:pPr>
             <a:r>
-              <a:rPr lang="en-US" sz="1050" dirty="0">
+              <a:rPr lang="en-US" sz="1000" dirty="0">
                 <a:solidFill>
                   <a:srgbClr val="24313F"/>
                 </a:solidFill>
@@ -4668,7 +4716,7 @@
               </a:rPr>
               <a:t>CFG: 지시 있음·없음 두 예측을 가중 결합 / VQA: 텍스트 생성</a:t>
             </a:r>
-            <a:endParaRPr lang="en-US" sz="1050" dirty="0"/>
+            <a:endParaRPr lang="en-US" sz="1000" dirty="0"/>
           </a:p>
         </p:txBody>
       </p:sp>
@@ -4680,7 +4728,7 @@
         </p:nvSpPr>
         <p:spPr>
           <a:xfrm>
-            <a:off x="8835161" y="4937760"/>
+            <a:off x="8835161" y="5207508"/>
             <a:ext cx="228600" cy="0"/>
           </a:xfrm>
           <a:prstGeom prst="line">
@@ -4704,12 +4752,12 @@
         </p:nvSpPr>
         <p:spPr>
           <a:xfrm>
-            <a:off x="9109481" y="4663440"/>
-            <a:ext cx="2533574" cy="548640"/>
+            <a:off x="9109481" y="4956048"/>
+            <a:ext cx="2533574" cy="502920"/>
           </a:xfrm>
           <a:prstGeom prst="roundRect">
             <a:avLst>
-              <a:gd name="adj" fmla="val 58333"/>
+              <a:gd name="adj" fmla="val 63636"/>
             </a:avLst>
           </a:prstGeom>
           <a:solidFill>
@@ -4731,8 +4779,8 @@
         </p:nvSpPr>
         <p:spPr>
           <a:xfrm>
-            <a:off x="9246641" y="4663440"/>
-            <a:ext cx="2259254" cy="548640"/>
+            <a:off x="9246641" y="4956048"/>
+            <a:ext cx="2259254" cy="502920"/>
           </a:xfrm>
           <a:prstGeom prst="rect">
             <a:avLst/>
@@ -4770,8 +4818,8 @@
         </p:nvSpPr>
         <p:spPr>
           <a:xfrm>
-            <a:off x="9109481" y="5285232"/>
-            <a:ext cx="2533574" cy="822960"/>
+            <a:off x="9109481" y="5532120"/>
+            <a:ext cx="2533574" cy="731520"/>
           </a:xfrm>
           <a:prstGeom prst="rect">
             <a:avLst/>
@@ -4787,7 +4835,7 @@
               <a:buNone/>
             </a:pPr>
             <a:r>
-              <a:rPr lang="en-US" sz="1050" dirty="0">
+              <a:rPr lang="en-US" sz="1000" dirty="0">
                 <a:solidFill>
                   <a:srgbClr val="24313F"/>
                 </a:solidFill>
@@ -4795,9 +4843,9 @@
                 <a:ea typeface="Malgun Gothic" pitchFamily="34" charset="-122"/>
                 <a:cs typeface="Malgun Gothic" pitchFamily="34" charset="-120"/>
               </a:rPr>
-              <a:t>궤적 교체 → 차가 지시대로 주행 / 답을 패널에 표시</a:t>
-            </a:r>
-            <a:endParaRPr lang="en-US" sz="1050" dirty="0"/>
+              <a:t>다음 추론부터 궤적 교체 → 차가 지시대로 주행 / 답을 패널에 표시</a:t>
+            </a:r>
+            <a:endParaRPr lang="en-US" sz="1000" dirty="0"/>
           </a:p>
         </p:txBody>
       </p:sp>
@@ -6156,7 +6204,7 @@
                 <a:ea typeface="Malgun Gothic" pitchFamily="34" charset="-122"/>
                 <a:cs typeface="Malgun Gothic" pitchFamily="34" charset="-120"/>
               </a:rPr>
-              <a:t>궤적 나이 (async)</a:t>
+              <a:t>궤적 나이 (비동기 run)</a:t>
             </a:r>
             <a:endParaRPr lang="en-US" sz="1000" dirty="0"/>
           </a:p>
@@ -12809,7 +12857,7 @@
                 <a:ea typeface="Malgun Gothic" pitchFamily="34" charset="-122"/>
                 <a:cs typeface="Malgun Gothic" pitchFamily="34" charset="-120"/>
               </a:rPr>
-              <a:t>모델이 운전 (비동기 모드, pygame 화면)</a:t>
+              <a:t>동기 모드로 주행 품질, 이어서 비동기 모드로 실시간성(궤적 나이)</a:t>
             </a:r>
             <a:endParaRPr lang="en-US" sz="1100" dirty="0"/>
           </a:p>
@@ -20377,7 +20425,7 @@
         <p:spPr>
           <a:xfrm>
             <a:off x="731520" y="1554480"/>
-            <a:ext cx="0" cy="3621024"/>
+            <a:ext cx="0" cy="3840480"/>
           </a:xfrm>
           <a:prstGeom prst="line">
             <a:avLst/>
@@ -20607,7 +20655,7 @@
         </p:nvSpPr>
         <p:spPr>
           <a:xfrm>
-            <a:off x="576072" y="2002536"/>
+            <a:off x="576072" y="1947672"/>
             <a:ext cx="310896" cy="310896"/>
           </a:xfrm>
           <a:prstGeom prst="ellipse">
@@ -20632,7 +20680,7 @@
         </p:nvSpPr>
         <p:spPr>
           <a:xfrm>
-            <a:off x="576072" y="2002536"/>
+            <a:off x="576072" y="1947672"/>
             <a:ext cx="310896" cy="310896"/>
           </a:xfrm>
           <a:prstGeom prst="rect">
@@ -20671,7 +20719,7 @@
         </p:nvSpPr>
         <p:spPr>
           <a:xfrm>
-            <a:off x="1051560" y="1975104"/>
+            <a:off x="1051560" y="1920240"/>
             <a:ext cx="1737360" cy="365760"/>
           </a:xfrm>
           <a:prstGeom prst="rect">
@@ -20710,7 +20758,7 @@
         </p:nvSpPr>
         <p:spPr>
           <a:xfrm>
-            <a:off x="2834640" y="1993392"/>
+            <a:off x="2834640" y="1938528"/>
             <a:ext cx="5943600" cy="329184"/>
           </a:xfrm>
           <a:prstGeom prst="roundRect">
@@ -20737,7 +20785,7 @@
         </p:nvSpPr>
         <p:spPr>
           <a:xfrm>
-            <a:off x="2926080" y="1993392"/>
+            <a:off x="2926080" y="1938528"/>
             <a:ext cx="5760720" cy="329184"/>
           </a:xfrm>
           <a:prstGeom prst="rect">
@@ -20776,7 +20824,7 @@
         </p:nvSpPr>
         <p:spPr>
           <a:xfrm>
-            <a:off x="8915400" y="1975104"/>
+            <a:off x="8915400" y="1920240"/>
             <a:ext cx="2727655" cy="365760"/>
           </a:xfrm>
           <a:prstGeom prst="rect">
@@ -20815,7 +20863,7 @@
         </p:nvSpPr>
         <p:spPr>
           <a:xfrm>
-            <a:off x="576072" y="2606040"/>
+            <a:off x="576072" y="2496312"/>
             <a:ext cx="310896" cy="310896"/>
           </a:xfrm>
           <a:prstGeom prst="ellipse">
@@ -20840,7 +20888,7 @@
         </p:nvSpPr>
         <p:spPr>
           <a:xfrm>
-            <a:off x="576072" y="2606040"/>
+            <a:off x="576072" y="2496312"/>
             <a:ext cx="310896" cy="310896"/>
           </a:xfrm>
           <a:prstGeom prst="rect">
@@ -20879,7 +20927,7 @@
         </p:nvSpPr>
         <p:spPr>
           <a:xfrm>
-            <a:off x="1051560" y="2578608"/>
+            <a:off x="1051560" y="2468880"/>
             <a:ext cx="1737360" cy="365760"/>
           </a:xfrm>
           <a:prstGeom prst="rect">
@@ -20918,7 +20966,7 @@
         </p:nvSpPr>
         <p:spPr>
           <a:xfrm>
-            <a:off x="2834640" y="2596896"/>
+            <a:off x="2834640" y="2487168"/>
             <a:ext cx="5943600" cy="329184"/>
           </a:xfrm>
           <a:prstGeom prst="roundRect">
@@ -20945,7 +20993,7 @@
         </p:nvSpPr>
         <p:spPr>
           <a:xfrm>
-            <a:off x="2926080" y="2596896"/>
+            <a:off x="2926080" y="2487168"/>
             <a:ext cx="5760720" cy="329184"/>
           </a:xfrm>
           <a:prstGeom prst="rect">
@@ -20984,7 +21032,7 @@
         </p:nvSpPr>
         <p:spPr>
           <a:xfrm>
-            <a:off x="8915400" y="2578608"/>
+            <a:off x="8915400" y="2468880"/>
             <a:ext cx="2727655" cy="365760"/>
           </a:xfrm>
           <a:prstGeom prst="rect">
@@ -21023,7 +21071,7 @@
         </p:nvSpPr>
         <p:spPr>
           <a:xfrm>
-            <a:off x="576072" y="3209544"/>
+            <a:off x="576072" y="3044952"/>
             <a:ext cx="310896" cy="310896"/>
           </a:xfrm>
           <a:prstGeom prst="ellipse">
@@ -21048,7 +21096,7 @@
         </p:nvSpPr>
         <p:spPr>
           <a:xfrm>
-            <a:off x="576072" y="3209544"/>
+            <a:off x="576072" y="3044952"/>
             <a:ext cx="310896" cy="310896"/>
           </a:xfrm>
           <a:prstGeom prst="rect">
@@ -21087,7 +21135,7 @@
         </p:nvSpPr>
         <p:spPr>
           <a:xfrm>
-            <a:off x="1051560" y="3182112"/>
+            <a:off x="1051560" y="3017520"/>
             <a:ext cx="1737360" cy="365760"/>
           </a:xfrm>
           <a:prstGeom prst="rect">
@@ -21112,7 +21160,7 @@
                 <a:ea typeface="Malgun Gothic" pitchFamily="34" charset="-122"/>
                 <a:cs typeface="Malgun Gothic" pitchFamily="34" charset="-120"/>
               </a:rPr>
-              <a:t>closed-loop</a:t>
+              <a:t>closed-loop (동기)</a:t>
             </a:r>
             <a:endParaRPr lang="en-US" sz="1200" dirty="0"/>
           </a:p>
@@ -21126,7 +21174,7 @@
         </p:nvSpPr>
         <p:spPr>
           <a:xfrm>
-            <a:off x="2834640" y="3200400"/>
+            <a:off x="2834640" y="3035808"/>
             <a:ext cx="5943600" cy="329184"/>
           </a:xfrm>
           <a:prstGeom prst="roundRect">
@@ -21153,7 +21201,7 @@
         </p:nvSpPr>
         <p:spPr>
           <a:xfrm>
-            <a:off x="2926080" y="3200400"/>
+            <a:off x="2926080" y="3035808"/>
             <a:ext cx="5760720" cy="329184"/>
           </a:xfrm>
           <a:prstGeom prst="rect">
@@ -21178,7 +21226,7 @@
                 <a:ea typeface="Courier New" pitchFamily="34" charset="-122"/>
                 <a:cs typeface="Courier New" pitchFamily="34" charset="-120"/>
               </a:rPr>
-              <a:t>python carlamayo.py --loop closed --version 1.5 --async --inference-server 172.31.20.213:50051</a:t>
+              <a:t>python carlamayo.py --loop closed --version 1.5 --inference-server 172.31.20.213:50051 --run-tag sync</a:t>
             </a:r>
             <a:endParaRPr lang="en-US" sz="850" dirty="0"/>
           </a:p>
@@ -21192,7 +21240,7 @@
         </p:nvSpPr>
         <p:spPr>
           <a:xfrm>
-            <a:off x="8915400" y="3182112"/>
+            <a:off x="8915400" y="3017520"/>
             <a:ext cx="2727655" cy="365760"/>
           </a:xfrm>
           <a:prstGeom prst="rect">
@@ -21217,7 +21265,7 @@
                 <a:ea typeface="Malgun Gothic" pitchFamily="34" charset="-122"/>
                 <a:cs typeface="Malgun Gothic" pitchFamily="34" charset="-120"/>
               </a:rPr>
-              <a:t>pygame 창: 모델이 운전, 빨간 궤적·CoT·상태 패널</a:t>
+              <a:t>모델이 운전. 추론 중 화면이 멈추는 것이 정상. Esc로 끝내야 영상 저장</a:t>
             </a:r>
             <a:endParaRPr lang="en-US" sz="1000" dirty="0"/>
           </a:p>
@@ -21231,7 +21279,7 @@
         </p:nvSpPr>
         <p:spPr>
           <a:xfrm>
-            <a:off x="576072" y="3813048"/>
+            <a:off x="576072" y="3593592"/>
             <a:ext cx="310896" cy="310896"/>
           </a:xfrm>
           <a:prstGeom prst="ellipse">
@@ -21256,7 +21304,7 @@
         </p:nvSpPr>
         <p:spPr>
           <a:xfrm>
-            <a:off x="576072" y="3813048"/>
+            <a:off x="576072" y="3593592"/>
             <a:ext cx="310896" cy="310896"/>
           </a:xfrm>
           <a:prstGeom prst="rect">
@@ -21295,7 +21343,7 @@
         </p:nvSpPr>
         <p:spPr>
           <a:xfrm>
-            <a:off x="1051560" y="3785616"/>
+            <a:off x="1051560" y="3566160"/>
             <a:ext cx="1737360" cy="365760"/>
           </a:xfrm>
           <a:prstGeom prst="rect">
@@ -21320,7 +21368,7 @@
                 <a:ea typeface="Malgun Gothic" pitchFamily="34" charset="-122"/>
                 <a:cs typeface="Malgun Gothic" pitchFamily="34" charset="-120"/>
               </a:rPr>
-              <a:t>navigation + CFG</a:t>
+              <a:t>closed-loop (비동기)</a:t>
             </a:r>
             <a:endParaRPr lang="en-US" sz="1200" dirty="0"/>
           </a:p>
@@ -21334,7 +21382,7 @@
         </p:nvSpPr>
         <p:spPr>
           <a:xfrm>
-            <a:off x="2834640" y="3803904"/>
+            <a:off x="2834640" y="3584448"/>
             <a:ext cx="5943600" cy="329184"/>
           </a:xfrm>
           <a:prstGeom prst="roundRect">
@@ -21361,7 +21409,7 @@
         </p:nvSpPr>
         <p:spPr>
           <a:xfrm>
-            <a:off x="2926080" y="3803904"/>
+            <a:off x="2926080" y="3584448"/>
             <a:ext cx="5760720" cy="329184"/>
           </a:xfrm>
           <a:prstGeom prst="rect">
@@ -21386,7 +21434,7 @@
                 <a:ea typeface="Courier New" pitchFamily="34" charset="-122"/>
                 <a:cs typeface="Courier New" pitchFamily="34" charset="-120"/>
               </a:rPr>
-              <a:t>위 + --mode navigation --navigation-text "Turn right in 30m" --navigation-weight 1.5</a:t>
+              <a:t>python carlamayo.py --loop closed --version 1.5 --async --inference-server 172.31.20.213:50051 --run-tag async</a:t>
             </a:r>
             <a:endParaRPr lang="en-US" sz="850" dirty="0"/>
           </a:p>
@@ -21400,7 +21448,7 @@
         </p:nvSpPr>
         <p:spPr>
           <a:xfrm>
-            <a:off x="8915400" y="3785616"/>
+            <a:off x="8915400" y="3566160"/>
             <a:ext cx="2727655" cy="365760"/>
           </a:xfrm>
           <a:prstGeom prst="rect">
@@ -21425,7 +21473,7 @@
                 <a:ea typeface="Malgun Gothic" pitchFamily="34" charset="-122"/>
                 <a:cs typeface="Malgun Gothic" pitchFamily="34" charset="-120"/>
               </a:rPr>
-              <a:t>창 입력창에 텍스트 | 1.5 → Enter → 다음 추론부터 반영</a:t>
+              <a:t>화면은 계속, 터미널 Trajectory age로 지연 확인. 반응이 늦음</a:t>
             </a:r>
             <a:endParaRPr lang="en-US" sz="1000" dirty="0"/>
           </a:p>
@@ -21439,7 +21487,7 @@
         </p:nvSpPr>
         <p:spPr>
           <a:xfrm>
-            <a:off x="576072" y="4416552"/>
+            <a:off x="576072" y="4142232"/>
             <a:ext cx="310896" cy="310896"/>
           </a:xfrm>
           <a:prstGeom prst="ellipse">
@@ -21464,7 +21512,7 @@
         </p:nvSpPr>
         <p:spPr>
           <a:xfrm>
-            <a:off x="576072" y="4416552"/>
+            <a:off x="576072" y="4142232"/>
             <a:ext cx="310896" cy="310896"/>
           </a:xfrm>
           <a:prstGeom prst="rect">
@@ -21503,7 +21551,7 @@
         </p:nvSpPr>
         <p:spPr>
           <a:xfrm>
-            <a:off x="1051560" y="4389120"/>
+            <a:off x="1051560" y="4114800"/>
             <a:ext cx="1737360" cy="365760"/>
           </a:xfrm>
           <a:prstGeom prst="rect">
@@ -21528,7 +21576,7 @@
                 <a:ea typeface="Malgun Gothic" pitchFamily="34" charset="-122"/>
                 <a:cs typeface="Malgun Gothic" pitchFamily="34" charset="-120"/>
               </a:rPr>
-              <a:t>VQA</a:t>
+              <a:t>navigation + CFG</a:t>
             </a:r>
             <a:endParaRPr lang="en-US" sz="1200" dirty="0"/>
           </a:p>
@@ -21542,7 +21590,7 @@
         </p:nvSpPr>
         <p:spPr>
           <a:xfrm>
-            <a:off x="2834640" y="4407408"/>
+            <a:off x="2834640" y="4133088"/>
             <a:ext cx="5943600" cy="329184"/>
           </a:xfrm>
           <a:prstGeom prst="roundRect">
@@ -21569,7 +21617,7 @@
         </p:nvSpPr>
         <p:spPr>
           <a:xfrm>
-            <a:off x="2926080" y="4407408"/>
+            <a:off x="2926080" y="4133088"/>
             <a:ext cx="5760720" cy="329184"/>
           </a:xfrm>
           <a:prstGeom prst="rect">
@@ -21594,7 +21642,7 @@
                 <a:ea typeface="Courier New" pitchFamily="34" charset="-122"/>
                 <a:cs typeface="Courier New" pitchFamily="34" charset="-120"/>
               </a:rPr>
-              <a:t>위 + --mode vqa --vqa-question "What is ahead?"</a:t>
+              <a:t>위 + --mode navigation --navigation-text "Turn right in 30m" --navigation-weight 1.5</a:t>
             </a:r>
             <a:endParaRPr lang="en-US" sz="850" dirty="0"/>
           </a:p>
@@ -21608,7 +21656,7 @@
         </p:nvSpPr>
         <p:spPr>
           <a:xfrm>
-            <a:off x="8915400" y="4389120"/>
+            <a:off x="8915400" y="4114800"/>
             <a:ext cx="2727655" cy="365760"/>
           </a:xfrm>
           <a:prstGeom prst="rect">
@@ -21633,7 +21681,7 @@
                 <a:ea typeface="Malgun Gothic" pitchFamily="34" charset="-122"/>
                 <a:cs typeface="Malgun Gothic" pitchFamily="34" charset="-120"/>
               </a:rPr>
-              <a:t>차량 정지, 답은 패널·터미널에 표시</a:t>
+              <a:t>창 입력창에 텍스트 | 1.5 → Enter → 다음 추론부터 반영</a:t>
             </a:r>
             <a:endParaRPr lang="en-US" sz="1000" dirty="0"/>
           </a:p>
@@ -21647,7 +21695,7 @@
         </p:nvSpPr>
         <p:spPr>
           <a:xfrm>
-            <a:off x="576072" y="5020056"/>
+            <a:off x="576072" y="4690872"/>
             <a:ext cx="310896" cy="310896"/>
           </a:xfrm>
           <a:prstGeom prst="ellipse">
@@ -21672,7 +21720,7 @@
         </p:nvSpPr>
         <p:spPr>
           <a:xfrm>
-            <a:off x="576072" y="5020056"/>
+            <a:off x="576072" y="4690872"/>
             <a:ext cx="310896" cy="310896"/>
           </a:xfrm>
           <a:prstGeom prst="rect">
@@ -21711,7 +21759,7 @@
         </p:nvSpPr>
         <p:spPr>
           <a:xfrm>
-            <a:off x="1051560" y="4992624"/>
+            <a:off x="1051560" y="4663440"/>
             <a:ext cx="1737360" cy="365760"/>
           </a:xfrm>
           <a:prstGeom prst="rect">
@@ -21736,7 +21784,7 @@
                 <a:ea typeface="Malgun Gothic" pitchFamily="34" charset="-122"/>
                 <a:cs typeface="Malgun Gothic" pitchFamily="34" charset="-120"/>
               </a:rPr>
-              <a:t>측정 정리</a:t>
+              <a:t>VQA</a:t>
             </a:r>
             <a:endParaRPr lang="en-US" sz="1200" dirty="0"/>
           </a:p>
@@ -21750,7 +21798,7 @@
         </p:nvSpPr>
         <p:spPr>
           <a:xfrm>
-            <a:off x="2834640" y="5010912"/>
+            <a:off x="2834640" y="4681728"/>
             <a:ext cx="5943600" cy="329184"/>
           </a:xfrm>
           <a:prstGeom prst="roundRect">
@@ -21777,7 +21825,7 @@
         </p:nvSpPr>
         <p:spPr>
           <a:xfrm>
-            <a:off x="2926080" y="5010912"/>
+            <a:off x="2926080" y="4681728"/>
             <a:ext cx="5760720" cy="329184"/>
           </a:xfrm>
           <a:prstGeom prst="rect">
@@ -21802,6 +21850,214 @@
                 <a:ea typeface="Courier New" pitchFamily="34" charset="-122"/>
                 <a:cs typeface="Courier New" pitchFamily="34" charset="-120"/>
               </a:rPr>
+              <a:t>위 + --mode vqa --vqa-question "What is ahead?"</a:t>
+            </a:r>
+            <a:endParaRPr lang="en-US" sz="850" dirty="0"/>
+          </a:p>
+        </p:txBody>
+      </p:sp>
+      <p:sp>
+        <p:nvSpPr>
+          <p:cNvPr id="48" name="Text 46"/>
+          <p:cNvSpPr txBox="1"/>
+          <p:nvPr/>
+        </p:nvSpPr>
+        <p:spPr>
+          <a:xfrm>
+            <a:off x="8915400" y="4663440"/>
+            <a:ext cx="2727655" cy="365760"/>
+          </a:xfrm>
+          <a:prstGeom prst="rect">
+            <a:avLst/>
+          </a:prstGeom>
+          <a:noFill/>
+          <a:ln/>
+        </p:spPr>
+        <p:txBody>
+          <a:bodyPr wrap="square" lIns="0" tIns="0" rIns="0" bIns="0" rtlCol="0" anchor="ctr"/>
+          <a:lstStyle/>
+          <a:p>
+            <a:pPr indent="0" marL="0">
+              <a:buNone/>
+            </a:pPr>
+            <a:r>
+              <a:rPr lang="en-US" sz="1000" dirty="0">
+                <a:solidFill>
+                  <a:srgbClr val="24313F"/>
+                </a:solidFill>
+                <a:latin typeface="Malgun Gothic" pitchFamily="34" charset="0"/>
+                <a:ea typeface="Malgun Gothic" pitchFamily="34" charset="-122"/>
+                <a:cs typeface="Malgun Gothic" pitchFamily="34" charset="-120"/>
+              </a:rPr>
+              <a:t>차량 정지, 답은 패널·터미널에 표시</a:t>
+            </a:r>
+            <a:endParaRPr lang="en-US" sz="1000" dirty="0"/>
+          </a:p>
+        </p:txBody>
+      </p:sp>
+      <p:sp>
+        <p:nvSpPr>
+          <p:cNvPr id="49" name="Shape 47"/>
+          <p:cNvSpPr/>
+          <p:nvPr/>
+        </p:nvSpPr>
+        <p:spPr>
+          <a:xfrm>
+            <a:off x="576072" y="5239512"/>
+            <a:ext cx="310896" cy="310896"/>
+          </a:xfrm>
+          <a:prstGeom prst="ellipse">
+            <a:avLst/>
+          </a:prstGeom>
+          <a:solidFill>
+            <a:srgbClr val="2A6FDB"/>
+          </a:solidFill>
+          <a:ln w="19050">
+            <a:solidFill>
+              <a:srgbClr val="FFFFFF"/>
+            </a:solidFill>
+            <a:prstDash val="solid"/>
+          </a:ln>
+        </p:spPr>
+      </p:sp>
+      <p:sp>
+        <p:nvSpPr>
+          <p:cNvPr id="50" name="Text 48"/>
+          <p:cNvSpPr txBox="1"/>
+          <p:nvPr/>
+        </p:nvSpPr>
+        <p:spPr>
+          <a:xfrm>
+            <a:off x="576072" y="5239512"/>
+            <a:ext cx="310896" cy="310896"/>
+          </a:xfrm>
+          <a:prstGeom prst="rect">
+            <a:avLst/>
+          </a:prstGeom>
+          <a:noFill/>
+          <a:ln/>
+        </p:spPr>
+        <p:txBody>
+          <a:bodyPr wrap="square" lIns="0" tIns="0" rIns="0" bIns="0" rtlCol="0" anchor="ctr"/>
+          <a:lstStyle/>
+          <a:p>
+            <a:pPr algn="ctr" indent="0" marL="0">
+              <a:buNone/>
+            </a:pPr>
+            <a:r>
+              <a:rPr lang="en-US" sz="1000" b="1" dirty="0">
+                <a:solidFill>
+                  <a:srgbClr val="FFFFFF"/>
+                </a:solidFill>
+                <a:latin typeface="Malgun Gothic" pitchFamily="34" charset="0"/>
+                <a:ea typeface="Malgun Gothic" pitchFamily="34" charset="-122"/>
+                <a:cs typeface="Malgun Gothic" pitchFamily="34" charset="-120"/>
+              </a:rPr>
+              <a:t>A</a:t>
+            </a:r>
+            <a:endParaRPr lang="en-US" sz="1000" dirty="0"/>
+          </a:p>
+        </p:txBody>
+      </p:sp>
+      <p:sp>
+        <p:nvSpPr>
+          <p:cNvPr id="51" name="Text 49"/>
+          <p:cNvSpPr txBox="1"/>
+          <p:nvPr/>
+        </p:nvSpPr>
+        <p:spPr>
+          <a:xfrm>
+            <a:off x="1051560" y="5212080"/>
+            <a:ext cx="1737360" cy="365760"/>
+          </a:xfrm>
+          <a:prstGeom prst="rect">
+            <a:avLst/>
+          </a:prstGeom>
+          <a:noFill/>
+          <a:ln/>
+        </p:spPr>
+        <p:txBody>
+          <a:bodyPr wrap="square" lIns="0" tIns="0" rIns="0" bIns="0" rtlCol="0" anchor="ctr"/>
+          <a:lstStyle/>
+          <a:p>
+            <a:pPr indent="0" marL="0">
+              <a:buNone/>
+            </a:pPr>
+            <a:r>
+              <a:rPr lang="en-US" sz="1200" b="1" dirty="0">
+                <a:solidFill>
+                  <a:srgbClr val="1B2A41"/>
+                </a:solidFill>
+                <a:latin typeface="Malgun Gothic" pitchFamily="34" charset="0"/>
+                <a:ea typeface="Malgun Gothic" pitchFamily="34" charset="-122"/>
+                <a:cs typeface="Malgun Gothic" pitchFamily="34" charset="-120"/>
+              </a:rPr>
+              <a:t>측정 정리</a:t>
+            </a:r>
+            <a:endParaRPr lang="en-US" sz="1200" dirty="0"/>
+          </a:p>
+        </p:txBody>
+      </p:sp>
+      <p:sp>
+        <p:nvSpPr>
+          <p:cNvPr id="52" name="Shape 50"/>
+          <p:cNvSpPr/>
+          <p:nvPr/>
+        </p:nvSpPr>
+        <p:spPr>
+          <a:xfrm>
+            <a:off x="2834640" y="5230368"/>
+            <a:ext cx="5943600" cy="329184"/>
+          </a:xfrm>
+          <a:prstGeom prst="roundRect">
+            <a:avLst>
+              <a:gd name="adj" fmla="val 13889"/>
+            </a:avLst>
+          </a:prstGeom>
+          <a:solidFill>
+            <a:srgbClr val="1E1E1E"/>
+          </a:solidFill>
+          <a:ln w="12700">
+            <a:solidFill>
+              <a:srgbClr val="1E1E1E"/>
+            </a:solidFill>
+            <a:prstDash val="solid"/>
+          </a:ln>
+        </p:spPr>
+      </p:sp>
+      <p:sp>
+        <p:nvSpPr>
+          <p:cNvPr id="53" name="Text 51"/>
+          <p:cNvSpPr txBox="1"/>
+          <p:nvPr/>
+        </p:nvSpPr>
+        <p:spPr>
+          <a:xfrm>
+            <a:off x="2926080" y="5230368"/>
+            <a:ext cx="5760720" cy="329184"/>
+          </a:xfrm>
+          <a:prstGeom prst="rect">
+            <a:avLst/>
+          </a:prstGeom>
+          <a:noFill/>
+          <a:ln/>
+        </p:spPr>
+        <p:txBody>
+          <a:bodyPr wrap="square" lIns="0" tIns="0" rIns="0" bIns="0" rtlCol="0" anchor="ctr"/>
+          <a:lstStyle/>
+          <a:p>
+            <a:pPr indent="0" marL="0">
+              <a:buNone/>
+            </a:pPr>
+            <a:r>
+              <a:rPr lang="en-US" sz="850" dirty="0">
+                <a:solidFill>
+                  <a:srgbClr val="E6E6E6"/>
+                </a:solidFill>
+                <a:latin typeface="Courier New" pitchFamily="34" charset="0"/>
+                <a:ea typeface="Courier New" pitchFamily="34" charset="-122"/>
+                <a:cs typeface="Courier New" pitchFamily="34" charset="-120"/>
+              </a:rPr>
               <a:t>tools/fetch_server_profile.sh &lt;run_id&gt;  →  python tools/analyze_run.py runs/&lt;run_id&gt;</a:t>
             </a:r>
             <a:endParaRPr lang="en-US" sz="850" dirty="0"/>
@@ -21810,13 +22066,13 @@
       </p:sp>
       <p:sp>
         <p:nvSpPr>
-          <p:cNvPr id="48" name="Text 46"/>
-          <p:cNvSpPr txBox="1"/>
-          <p:nvPr/>
-        </p:nvSpPr>
-        <p:spPr>
-          <a:xfrm>
-            <a:off x="8915400" y="4992624"/>
+          <p:cNvPr id="54" name="Text 52"/>
+          <p:cNvSpPr txBox="1"/>
+          <p:nvPr/>
+        </p:nvSpPr>
+        <p:spPr>
+          <a:xfrm>
+            <a:off x="8915400" y="5212080"/>
             <a:ext cx="2727655" cy="365760"/>
           </a:xfrm>
           <a:prstGeom prst="rect">
@@ -21849,7 +22105,7 @@
       </p:sp>
       <p:sp>
         <p:nvSpPr>
-          <p:cNvPr id="49" name="Text 47"/>
+          <p:cNvPr id="55" name="Text 53"/>
           <p:cNvSpPr txBox="1"/>
           <p:nvPr/>
         </p:nvSpPr>
@@ -21887,7 +22143,7 @@
                 <a:ea typeface="Malgun Gothic" pitchFamily="34" charset="-122"/>
                 <a:cs typeface="Malgun Gothic" pitchFamily="34" charset="-120"/>
               </a:rPr>
-              <a:t>UI 조작: Enter 프롬프트 적용 · Ctrl+P 일시정지/재개(시뮬 세계 전체 정지) · Esc 종료.   모든 실행은 runs/&lt;run_id&gt;/ 폴더(영상 2개, args.json, log.txt, 프로파일 CSV)를 남기고 B도 같은 이름의 폴더에 서버 기록을 남긴다</a:t>
+              <a:t>UI 조작: Enter 프롬프트 적용 · Ctrl+P 일시정지/재개(시뮬 세계 전체 정지) · Esc 종료(영상은 Esc/Ctrl+C로 끝내야 저장).   모든 실행은 runs/&lt;run_id&gt;/ 폴더(영상 2개, args.json, log.txt, 프로파일 CSV)를 남기고 B도 같은 이름의 폴더에 서버 기록을 남긴다</a:t>
             </a:r>
             <a:endParaRPr lang="en-US" sz="1050" dirty="0"/>
           </a:p>
@@ -22687,7 +22943,7 @@
                 <a:ea typeface="Malgun Gothic" pitchFamily="34" charset="-122"/>
                 <a:cs typeface="Malgun Gothic" pitchFamily="34" charset="-120"/>
               </a:rPr>
-              <a:t>카메라 영상 위의 궤적이 약 1초마다 바뀌고 차가 그 궤적을 따라 조향·가감속한다</a:t>
+              <a:t>동기 모드: 추론하는 동안 화면이 멈추고, 받은 궤적이 바로 그 장면에 적용된다. 멈춤은 모델 추론 시간이다</a:t>
             </a:r>
             <a:endParaRPr lang="en-US" sz="1200" dirty="0"/>
           </a:p>
@@ -22711,7 +22967,7 @@
                 <a:ea typeface="Malgun Gothic" pitchFamily="34" charset="-122"/>
                 <a:cs typeface="Malgun Gothic" pitchFamily="34" charset="-120"/>
               </a:rPr>
-              <a:t>패널의 traj age(궤적 나이)가 0~1 s 대로 유지되고 rtt ≈ 서버 추론 시간이다</a:t>
+              <a:t>차가 빨간 궤적을 따라 조향·가감속하고, 교차로에서 정지·회전하며 앞차에 맞춰 감속한다 (CoT에 근거 문장)</a:t>
             </a:r>
             <a:endParaRPr lang="en-US" sz="1200" dirty="0"/>
           </a:p>
@@ -22735,7 +22991,7 @@
                 <a:ea typeface="Malgun Gothic" pitchFamily="34" charset="-122"/>
                 <a:cs typeface="Malgun Gothic" pitchFamily="34" charset="-120"/>
               </a:rPr>
-              <a:t>교차로에서 정지·회전하고, 앞차에 맞춰 감속한다 (CoT에 근거 문장)</a:t>
+              <a:t>패널 inference ≈ 서버 추론 시간. rtt와의 차이가 분리 비용(인코딩 + 네트워크)</a:t>
             </a:r>
             <a:endParaRPr lang="en-US" sz="1200" dirty="0"/>
           </a:p>
@@ -22820,7 +23076,7 @@
                 <a:ea typeface="Malgun Gothic" pitchFamily="34" charset="-122"/>
                 <a:cs typeface="Malgun Gothic" pitchFamily="34" charset="-120"/>
               </a:rPr>
-              <a:t>비동기 모드: A의 tick은 10 Hz로 계속, 워커 스레드가 JPEG로 압축해 B에 요청</a:t>
+              <a:t>A가 카메라 4대×4프레임을 JPEG로 압축해 B에 요청, B는 한 번에 하나씩 처리(모델 락), 궤적을 돌려받아 PID로 제어</a:t>
             </a:r>
             <a:endParaRPr lang="en-US" sz="1200" dirty="0"/>
           </a:p>
@@ -22844,7 +23100,7 @@
                 <a:ea typeface="Malgun Gothic" pitchFamily="34" charset="-122"/>
                 <a:cs typeface="Malgun Gothic" pitchFamily="34" charset="-120"/>
               </a:rPr>
-              <a:t>B는 요청을 한 번에 하나씩 처리(모델 락). 응답 궤적은 다음 tick부터 사용</a:t>
+              <a:t>비동기(--async)로 바꾸면 화면은 10 Hz로 계속 가지만 궤적은 왕복 시간만큼 오래된 장면 기준(traj age) → 반응이 늦다. 실시간성 시연용</a:t>
             </a:r>
             <a:endParaRPr lang="en-US" sz="1200" dirty="0"/>
           </a:p>
